--- a/I UNIDAD/Presentaciones/I UNIDAD Programación Básica.pptx
+++ b/I UNIDAD/Presentaciones/I UNIDAD Programación Básica.pptx
@@ -29,37 +29,38 @@
     <p:sldId id="274" r:id="rId24"/>
     <p:sldId id="275" r:id="rId25"/>
     <p:sldId id="276" r:id="rId26"/>
+    <p:sldId id="277" r:id="rId27"/>
   </p:sldIdLst>
   <p:sldSz cy="6858000" cx="12192000"/>
   <p:notesSz cx="6858000" cy="9144000"/>
   <p:embeddedFontLst>
     <p:embeddedFont>
       <p:font typeface="DM Sans Medium"/>
-      <p:regular r:id="rId27"/>
-      <p:bold r:id="rId28"/>
-      <p:italic r:id="rId29"/>
-      <p:boldItalic r:id="rId30"/>
+      <p:regular r:id="rId28"/>
+      <p:bold r:id="rId29"/>
+      <p:italic r:id="rId30"/>
+      <p:boldItalic r:id="rId31"/>
     </p:embeddedFont>
     <p:embeddedFont>
       <p:font typeface="Roboto Mono"/>
-      <p:regular r:id="rId31"/>
-      <p:bold r:id="rId32"/>
-      <p:italic r:id="rId33"/>
-      <p:boldItalic r:id="rId34"/>
+      <p:regular r:id="rId32"/>
+      <p:bold r:id="rId33"/>
+      <p:italic r:id="rId34"/>
+      <p:boldItalic r:id="rId35"/>
     </p:embeddedFont>
     <p:embeddedFont>
       <p:font typeface="Merriweather"/>
-      <p:regular r:id="rId35"/>
-      <p:bold r:id="rId36"/>
-      <p:italic r:id="rId37"/>
-      <p:boldItalic r:id="rId38"/>
+      <p:regular r:id="rId36"/>
+      <p:bold r:id="rId37"/>
+      <p:italic r:id="rId38"/>
+      <p:boldItalic r:id="rId39"/>
     </p:embeddedFont>
     <p:embeddedFont>
       <p:font typeface="DM Sans"/>
-      <p:regular r:id="rId39"/>
-      <p:bold r:id="rId40"/>
-      <p:italic r:id="rId41"/>
-      <p:boldItalic r:id="rId42"/>
+      <p:regular r:id="rId40"/>
+      <p:bold r:id="rId41"/>
+      <p:italic r:id="rId42"/>
+      <p:boldItalic r:id="rId43"/>
     </p:embeddedFont>
   </p:embeddedFontLst>
   <p:defaultTextStyle>
@@ -2411,7 +2412,7 @@
       </p:grpSpPr>
       <p:sp>
         <p:nvSpPr>
-          <p:cNvPr id="467" name="Google Shape;467;p12:notes"/>
+          <p:cNvPr id="467" name="Google Shape;467;g3ed3699c97b_0_0:notes"/>
           <p:cNvSpPr txBox="1"/>
           <p:nvPr>
             <p:ph idx="1" type="body"/>
@@ -2458,7 +2459,124 @@
       </p:sp>
       <p:sp>
         <p:nvSpPr>
-          <p:cNvPr id="468" name="Google Shape;468;p12:notes"/>
+          <p:cNvPr id="468" name="Google Shape;468;g3ed3699c97b_0_0:notes"/>
+          <p:cNvSpPr/>
+          <p:nvPr>
+            <p:ph idx="2" type="sldImg"/>
+          </p:nvPr>
+        </p:nvSpPr>
+        <p:spPr>
+          <a:xfrm>
+            <a:off x="1143225" y="685800"/>
+            <a:ext cx="4572300" cy="3429000"/>
+          </a:xfrm>
+          <a:custGeom>
+            <a:rect b="b" l="l" r="r" t="t"/>
+            <a:pathLst>
+              <a:path extrusionOk="0" h="120000" w="120000">
+                <a:moveTo>
+                  <a:pt x="0" y="0"/>
+                </a:moveTo>
+                <a:lnTo>
+                  <a:pt x="120000" y="0"/>
+                </a:lnTo>
+                <a:lnTo>
+                  <a:pt x="120000" y="120000"/>
+                </a:lnTo>
+                <a:lnTo>
+                  <a:pt x="0" y="120000"/>
+                </a:lnTo>
+                <a:close/>
+              </a:path>
+            </a:pathLst>
+          </a:custGeom>
+          <a:noFill/>
+          <a:ln cap="flat" cmpd="sng" w="9525">
+            <a:solidFill>
+              <a:srgbClr val="000000"/>
+            </a:solidFill>
+            <a:prstDash val="solid"/>
+            <a:round/>
+            <a:headEnd len="sm" w="sm" type="none"/>
+            <a:tailEnd len="sm" w="sm" type="none"/>
+          </a:ln>
+        </p:spPr>
+      </p:sp>
+    </p:spTree>
+  </p:cSld>
+  <p:clrMapOvr>
+    <a:masterClrMapping/>
+  </p:clrMapOvr>
+</p:notes>
+</file>
+
+<file path=ppt/notesSlides/notesSlide22.xml><?xml version="1.0" encoding="utf-8"?>
+<p:notes xmlns:a="http://schemas.openxmlformats.org/drawingml/2006/main" xmlns:r="http://schemas.openxmlformats.org/officeDocument/2006/relationships" xmlns:mc="http://schemas.openxmlformats.org/markup-compatibility/2006" xmlns:mv="urn:schemas-microsoft-com:mac:vml" xmlns:p="http://schemas.openxmlformats.org/presentationml/2006/main" xmlns:c="http://schemas.openxmlformats.org/drawingml/2006/chart" xmlns:dgm="http://schemas.openxmlformats.org/drawingml/2006/diagram" xmlns:o="urn:schemas-microsoft-com:office:office" xmlns:v="urn:schemas-microsoft-com:vml" xmlns:pvml="urn:schemas-microsoft-com:office:powerpoint" xmlns:com="http://schemas.openxmlformats.org/drawingml/2006/compatibility" xmlns:p14="http://schemas.microsoft.com/office/powerpoint/2010/main" xmlns:p15="http://schemas.microsoft.com/office/powerpoint/2012/main" xmlns:ahyp="http://schemas.microsoft.com/office/drawing/2018/hyperlinkcolor" showMasterPhAnim="0" showMasterSp="0">
+  <p:cSld>
+    <p:spTree>
+      <p:nvGrpSpPr>
+        <p:cNvPr id="483" name="Shape 483"/>
+        <p:cNvGrpSpPr/>
+        <p:nvPr/>
+      </p:nvGrpSpPr>
+      <p:grpSpPr>
+        <a:xfrm>
+          <a:off x="0" y="0"/>
+          <a:ext cx="0" cy="0"/>
+          <a:chOff x="0" y="0"/>
+          <a:chExt cx="0" cy="0"/>
+        </a:xfrm>
+      </p:grpSpPr>
+      <p:sp>
+        <p:nvSpPr>
+          <p:cNvPr id="484" name="Google Shape;484;p12:notes"/>
+          <p:cNvSpPr txBox="1"/>
+          <p:nvPr>
+            <p:ph idx="1" type="body"/>
+          </p:nvPr>
+        </p:nvSpPr>
+        <p:spPr>
+          <a:xfrm>
+            <a:off x="685800" y="4343400"/>
+            <a:ext cx="5486400" cy="4114800"/>
+          </a:xfrm>
+          <a:prstGeom prst="rect">
+            <a:avLst/>
+          </a:prstGeom>
+          <a:noFill/>
+          <a:ln>
+            <a:noFill/>
+          </a:ln>
+        </p:spPr>
+        <p:txBody>
+          <a:bodyPr anchorCtr="0" anchor="t" bIns="91425" lIns="91425" spcFirstLastPara="1" rIns="91425" wrap="square" tIns="91425">
+            <a:noAutofit/>
+          </a:bodyPr>
+          <a:lstStyle/>
+          <a:p>
+            <a:pPr indent="0" lvl="0" marL="0" rtl="0" algn="l">
+              <a:lnSpc>
+                <a:spcPct val="100000"/>
+              </a:lnSpc>
+              <a:spcBef>
+                <a:spcPts val="0"/>
+              </a:spcBef>
+              <a:spcAft>
+                <a:spcPts val="0"/>
+              </a:spcAft>
+              <a:buSzPts val="1100"/>
+              <a:buNone/>
+            </a:pPr>
+            <a:r>
+              <a:t/>
+            </a:r>
+            <a:endParaRPr/>
+          </a:p>
+        </p:txBody>
+      </p:sp>
+      <p:sp>
+        <p:nvSpPr>
+          <p:cNvPr id="485" name="Google Shape;485;p12:notes"/>
           <p:cNvSpPr/>
           <p:nvPr>
             <p:ph idx="2" type="sldImg"/>
@@ -26791,6 +26909,18 @@
 <file path=ppt/slides/slide21.xml><?xml version="1.0" encoding="utf-8"?>
 <p:sld xmlns:a="http://schemas.openxmlformats.org/drawingml/2006/main" xmlns:r="http://schemas.openxmlformats.org/officeDocument/2006/relationships" xmlns:mc="http://schemas.openxmlformats.org/markup-compatibility/2006" xmlns:mv="urn:schemas-microsoft-com:mac:vml" xmlns:p="http://schemas.openxmlformats.org/presentationml/2006/main" xmlns:c="http://schemas.openxmlformats.org/drawingml/2006/chart" xmlns:dgm="http://schemas.openxmlformats.org/drawingml/2006/diagram" xmlns:o="urn:schemas-microsoft-com:office:office" xmlns:v="urn:schemas-microsoft-com:vml" xmlns:pvml="urn:schemas-microsoft-com:office:powerpoint" xmlns:com="http://schemas.openxmlformats.org/drawingml/2006/compatibility" xmlns:p14="http://schemas.microsoft.com/office/powerpoint/2010/main" xmlns:p15="http://schemas.microsoft.com/office/powerpoint/2012/main" xmlns:ahyp="http://schemas.microsoft.com/office/drawing/2018/hyperlinkcolor">
   <p:cSld>
+    <p:bg>
+      <p:bgPr>
+        <a:blipFill>
+          <a:blip r:embed="rId3">
+            <a:alphaModFix/>
+          </a:blip>
+          <a:stretch>
+            <a:fillRect/>
+          </a:stretch>
+        </a:blipFill>
+      </p:bgPr>
+    </p:bg>
     <p:spTree>
       <p:nvGrpSpPr>
         <p:cNvPr id="469" name="Shape 469"/>
@@ -26807,7 +26937,1053 @@
       </p:grpSpPr>
       <p:pic>
         <p:nvPicPr>
-          <p:cNvPr descr="image.png" id="470" name="Google Shape;470;p34"/>
+          <p:cNvPr id="470" name="Google Shape;470;p34"/>
+          <p:cNvPicPr preferRelativeResize="0"/>
+          <p:nvPr/>
+        </p:nvPicPr>
+        <p:blipFill rotWithShape="1">
+          <a:blip r:embed="rId4">
+            <a:alphaModFix/>
+          </a:blip>
+          <a:srcRect b="0" l="0" r="0" t="0"/>
+          <a:stretch/>
+        </p:blipFill>
+        <p:spPr>
+          <a:xfrm>
+            <a:off x="0" y="0"/>
+            <a:ext cx="12192000" cy="6858000"/>
+          </a:xfrm>
+          <a:prstGeom prst="rect">
+            <a:avLst/>
+          </a:prstGeom>
+          <a:noFill/>
+          <a:ln>
+            <a:noFill/>
+          </a:ln>
+        </p:spPr>
+      </p:pic>
+      <p:sp>
+        <p:nvSpPr>
+          <p:cNvPr id="471" name="Google Shape;471;p34"/>
+          <p:cNvSpPr/>
+          <p:nvPr/>
+        </p:nvSpPr>
+        <p:spPr>
+          <a:xfrm>
+            <a:off x="0" y="0"/>
+            <a:ext cx="12192000" cy="952500"/>
+          </a:xfrm>
+          <a:prstGeom prst="rect">
+            <a:avLst/>
+          </a:prstGeom>
+          <a:solidFill>
+            <a:srgbClr val="FFFFFF">
+              <a:alpha val="60000"/>
+            </a:srgbClr>
+          </a:solidFill>
+          <a:ln>
+            <a:noFill/>
+          </a:ln>
+        </p:spPr>
+        <p:txBody>
+          <a:bodyPr anchorCtr="0" anchor="ctr" bIns="0" lIns="0" spcFirstLastPara="1" rIns="0" wrap="square" tIns="0">
+            <a:noAutofit/>
+          </a:bodyPr>
+          <a:lstStyle/>
+          <a:p>
+            <a:pPr indent="0" lvl="0" marL="0" rtl="0" algn="l">
+              <a:spcBef>
+                <a:spcPts val="0"/>
+              </a:spcBef>
+              <a:spcAft>
+                <a:spcPts val="0"/>
+              </a:spcAft>
+              <a:buNone/>
+            </a:pPr>
+            <a:r>
+              <a:t/>
+            </a:r>
+            <a:endParaRPr/>
+          </a:p>
+        </p:txBody>
+      </p:sp>
+      <p:sp>
+        <p:nvSpPr>
+          <p:cNvPr id="472" name="Google Shape;472;p34"/>
+          <p:cNvSpPr txBox="1"/>
+          <p:nvPr/>
+        </p:nvSpPr>
+        <p:spPr>
+          <a:xfrm>
+            <a:off x="476250" y="67575"/>
+            <a:ext cx="11239500" cy="1074300"/>
+          </a:xfrm>
+          <a:prstGeom prst="rect">
+            <a:avLst/>
+          </a:prstGeom>
+          <a:noFill/>
+          <a:ln>
+            <a:noFill/>
+          </a:ln>
+        </p:spPr>
+        <p:txBody>
+          <a:bodyPr anchorCtr="0" anchor="ctr" bIns="0" lIns="0" spcFirstLastPara="1" rIns="0" wrap="square" tIns="0">
+            <a:noAutofit/>
+          </a:bodyPr>
+          <a:lstStyle/>
+          <a:p>
+            <a:pPr indent="0" lvl="0" marL="0" rtl="0" algn="l">
+              <a:spcBef>
+                <a:spcPts val="0"/>
+              </a:spcBef>
+              <a:spcAft>
+                <a:spcPts val="0"/>
+              </a:spcAft>
+              <a:buNone/>
+            </a:pPr>
+            <a:r>
+              <a:rPr b="1" lang="en-US" sz="3200">
+                <a:solidFill>
+                  <a:srgbClr val="005088"/>
+                </a:solidFill>
+                <a:latin typeface="Merriweather"/>
+                <a:ea typeface="Merriweather"/>
+                <a:cs typeface="Merriweather"/>
+                <a:sym typeface="Merriweather"/>
+              </a:rPr>
+              <a:t>Ejemplo 1: </a:t>
+            </a:r>
+            <a:r>
+              <a:rPr b="1" lang="en-US" sz="3200">
+                <a:solidFill>
+                  <a:srgbClr val="005088"/>
+                </a:solidFill>
+                <a:latin typeface="Merriweather"/>
+                <a:ea typeface="Merriweather"/>
+                <a:cs typeface="Merriweather"/>
+                <a:sym typeface="Merriweather"/>
+              </a:rPr>
+              <a:t>Control de Platillos</a:t>
+            </a:r>
+            <a:endParaRPr b="1" sz="3200">
+              <a:solidFill>
+                <a:srgbClr val="005088"/>
+              </a:solidFill>
+              <a:latin typeface="Merriweather"/>
+              <a:ea typeface="Merriweather"/>
+              <a:cs typeface="Merriweather"/>
+              <a:sym typeface="Merriweather"/>
+            </a:endParaRPr>
+          </a:p>
+        </p:txBody>
+      </p:sp>
+      <p:sp>
+        <p:nvSpPr>
+          <p:cNvPr id="473" name="Google Shape;473;p34"/>
+          <p:cNvSpPr/>
+          <p:nvPr/>
+        </p:nvSpPr>
+        <p:spPr>
+          <a:xfrm>
+            <a:off x="476250" y="1333500"/>
+            <a:ext cx="3619500" cy="4953000"/>
+          </a:xfrm>
+          <a:prstGeom prst="roundRect">
+            <a:avLst>
+              <a:gd fmla="val 2631" name="adj"/>
+            </a:avLst>
+          </a:prstGeom>
+          <a:solidFill>
+            <a:srgbClr val="FFFFFF"/>
+          </a:solidFill>
+          <a:ln cap="flat" cmpd="sng" w="19050">
+            <a:solidFill>
+              <a:srgbClr val="005088"/>
+            </a:solidFill>
+            <a:prstDash val="solid"/>
+            <a:round/>
+            <a:headEnd len="sm" w="sm" type="none"/>
+            <a:tailEnd len="sm" w="sm" type="none"/>
+          </a:ln>
+        </p:spPr>
+        <p:txBody>
+          <a:bodyPr anchorCtr="0" anchor="ctr" bIns="0" lIns="0" spcFirstLastPara="1" rIns="0" wrap="square" tIns="0">
+            <a:noAutofit/>
+          </a:bodyPr>
+          <a:lstStyle/>
+          <a:p>
+            <a:pPr indent="0" lvl="0" marL="0" rtl="0" algn="l">
+              <a:spcBef>
+                <a:spcPts val="0"/>
+              </a:spcBef>
+              <a:spcAft>
+                <a:spcPts val="0"/>
+              </a:spcAft>
+              <a:buNone/>
+            </a:pPr>
+            <a:r>
+              <a:t/>
+            </a:r>
+            <a:endParaRPr/>
+          </a:p>
+        </p:txBody>
+      </p:sp>
+      <p:grpSp>
+        <p:nvGrpSpPr>
+          <p:cNvPr id="474" name="Google Shape;474;p34"/>
+          <p:cNvGrpSpPr/>
+          <p:nvPr/>
+        </p:nvGrpSpPr>
+        <p:grpSpPr>
+          <a:xfrm>
+            <a:off x="666750" y="1524000"/>
+            <a:ext cx="3238500" cy="4572150"/>
+            <a:chOff x="666750" y="1524000"/>
+            <a:chExt cx="3238500" cy="4572150"/>
+          </a:xfrm>
+        </p:grpSpPr>
+        <p:sp>
+          <p:nvSpPr>
+            <p:cNvPr id="475" name="Google Shape;475;p34"/>
+            <p:cNvSpPr txBox="1"/>
+            <p:nvPr/>
+          </p:nvSpPr>
+          <p:spPr>
+            <a:xfrm>
+              <a:off x="666750" y="1524000"/>
+              <a:ext cx="3238500" cy="381000"/>
+            </a:xfrm>
+            <a:prstGeom prst="rect">
+              <a:avLst/>
+            </a:prstGeom>
+            <a:noFill/>
+            <a:ln>
+              <a:noFill/>
+            </a:ln>
+          </p:spPr>
+          <p:txBody>
+            <a:bodyPr anchorCtr="0" anchor="ctr" bIns="0" lIns="0" spcFirstLastPara="1" rIns="0" wrap="square" tIns="0">
+              <a:noAutofit/>
+            </a:bodyPr>
+            <a:lstStyle/>
+            <a:p>
+              <a:pPr indent="0" lvl="0" marL="0" rtl="0" algn="l">
+                <a:spcBef>
+                  <a:spcPts val="0"/>
+                </a:spcBef>
+                <a:spcAft>
+                  <a:spcPts val="0"/>
+                </a:spcAft>
+                <a:buNone/>
+              </a:pPr>
+              <a:r>
+                <a:rPr b="1" lang="en-US" sz="1800">
+                  <a:solidFill>
+                    <a:srgbClr val="005088"/>
+                  </a:solidFill>
+                  <a:latin typeface="Merriweather"/>
+                  <a:ea typeface="Merriweather"/>
+                  <a:cs typeface="Merriweather"/>
+                  <a:sym typeface="Merriweather"/>
+                </a:rPr>
+                <a:t>Contexto</a:t>
+              </a:r>
+              <a:endParaRPr b="1" sz="1800">
+                <a:solidFill>
+                  <a:srgbClr val="005088"/>
+                </a:solidFill>
+                <a:latin typeface="Merriweather"/>
+                <a:ea typeface="Merriweather"/>
+                <a:cs typeface="Merriweather"/>
+                <a:sym typeface="Merriweather"/>
+              </a:endParaRPr>
+            </a:p>
+          </p:txBody>
+        </p:sp>
+        <p:sp>
+          <p:nvSpPr>
+            <p:cNvPr id="476" name="Google Shape;476;p34"/>
+            <p:cNvSpPr txBox="1"/>
+            <p:nvPr/>
+          </p:nvSpPr>
+          <p:spPr>
+            <a:xfrm>
+              <a:off x="666750" y="2000250"/>
+              <a:ext cx="3238500" cy="4095900"/>
+            </a:xfrm>
+            <a:prstGeom prst="rect">
+              <a:avLst/>
+            </a:prstGeom>
+            <a:noFill/>
+            <a:ln>
+              <a:noFill/>
+            </a:ln>
+          </p:spPr>
+          <p:txBody>
+            <a:bodyPr anchorCtr="0" anchor="t" bIns="0" lIns="0" spcFirstLastPara="1" rIns="0" wrap="square" tIns="0">
+              <a:noAutofit/>
+            </a:bodyPr>
+            <a:lstStyle/>
+            <a:p>
+              <a:pPr indent="0" lvl="0" marL="0" rtl="0" algn="l">
+                <a:lnSpc>
+                  <a:spcPct val="115000"/>
+                </a:lnSpc>
+                <a:spcBef>
+                  <a:spcPts val="1200"/>
+                </a:spcBef>
+                <a:spcAft>
+                  <a:spcPts val="0"/>
+                </a:spcAft>
+                <a:buNone/>
+              </a:pPr>
+              <a:r>
+                <a:rPr lang="en-US" sz="1700">
+                  <a:solidFill>
+                    <a:schemeClr val="dk1"/>
+                  </a:solidFill>
+                </a:rPr>
+                <a:t>El gerente de un restaurante te pide diseñar el módulo del menú digital para el restaurante. El sistema debe permitir registrar platillos con sus precios, pero también reaccionar rápido si la inflación obliga a subir un precio o si un ingrediente se agota por completo.</a:t>
+              </a:r>
+              <a:endParaRPr sz="1700">
+                <a:solidFill>
+                  <a:schemeClr val="dk1"/>
+                </a:solidFill>
+              </a:endParaRPr>
+            </a:p>
+            <a:p>
+              <a:pPr indent="0" lvl="0" marL="0" rtl="0" algn="l">
+                <a:lnSpc>
+                  <a:spcPct val="115000"/>
+                </a:lnSpc>
+                <a:spcBef>
+                  <a:spcPts val="1200"/>
+                </a:spcBef>
+                <a:spcAft>
+                  <a:spcPts val="1200"/>
+                </a:spcAft>
+                <a:buNone/>
+              </a:pPr>
+              <a:r>
+                <a:t/>
+              </a:r>
+              <a:endParaRPr sz="1900">
+                <a:solidFill>
+                  <a:schemeClr val="dk1"/>
+                </a:solidFill>
+              </a:endParaRPr>
+            </a:p>
+          </p:txBody>
+        </p:sp>
+      </p:grpSp>
+      <p:sp>
+        <p:nvSpPr>
+          <p:cNvPr id="477" name="Google Shape;477;p34"/>
+          <p:cNvSpPr/>
+          <p:nvPr/>
+        </p:nvSpPr>
+        <p:spPr>
+          <a:xfrm>
+            <a:off x="4286250" y="1333500"/>
+            <a:ext cx="7429500" cy="4953000"/>
+          </a:xfrm>
+          <a:prstGeom prst="roundRect">
+            <a:avLst>
+              <a:gd fmla="val 1923" name="adj"/>
+            </a:avLst>
+          </a:prstGeom>
+          <a:solidFill>
+            <a:srgbClr val="FFFFFF">
+              <a:alpha val="90000"/>
+            </a:srgbClr>
+          </a:solidFill>
+          <a:ln cap="flat" cmpd="sng" w="9525">
+            <a:solidFill>
+              <a:srgbClr val="005088"/>
+            </a:solidFill>
+            <a:prstDash val="solid"/>
+            <a:round/>
+            <a:headEnd len="sm" w="sm" type="none"/>
+            <a:tailEnd len="sm" w="sm" type="none"/>
+          </a:ln>
+        </p:spPr>
+        <p:txBody>
+          <a:bodyPr anchorCtr="0" anchor="ctr" bIns="0" lIns="0" spcFirstLastPara="1" rIns="0" wrap="square" tIns="0">
+            <a:noAutofit/>
+          </a:bodyPr>
+          <a:lstStyle/>
+          <a:p>
+            <a:pPr indent="0" lvl="0" marL="0" rtl="0" algn="l">
+              <a:spcBef>
+                <a:spcPts val="0"/>
+              </a:spcBef>
+              <a:spcAft>
+                <a:spcPts val="0"/>
+              </a:spcAft>
+              <a:buNone/>
+            </a:pPr>
+            <a:r>
+              <a:t/>
+            </a:r>
+            <a:endParaRPr/>
+          </a:p>
+        </p:txBody>
+      </p:sp>
+      <p:grpSp>
+        <p:nvGrpSpPr>
+          <p:cNvPr id="478" name="Google Shape;478;p34"/>
+          <p:cNvGrpSpPr/>
+          <p:nvPr/>
+        </p:nvGrpSpPr>
+        <p:grpSpPr>
+          <a:xfrm>
+            <a:off x="4476750" y="1428751"/>
+            <a:ext cx="7048500" cy="4762641"/>
+            <a:chOff x="4476750" y="1524000"/>
+            <a:chExt cx="7048500" cy="4571989"/>
+          </a:xfrm>
+        </p:grpSpPr>
+        <p:sp>
+          <p:nvSpPr>
+            <p:cNvPr id="479" name="Google Shape;479;p34"/>
+            <p:cNvSpPr txBox="1"/>
+            <p:nvPr/>
+          </p:nvSpPr>
+          <p:spPr>
+            <a:xfrm>
+              <a:off x="4476750" y="1524000"/>
+              <a:ext cx="7048500" cy="381000"/>
+            </a:xfrm>
+            <a:prstGeom prst="rect">
+              <a:avLst/>
+            </a:prstGeom>
+            <a:noFill/>
+            <a:ln>
+              <a:noFill/>
+            </a:ln>
+          </p:spPr>
+          <p:txBody>
+            <a:bodyPr anchorCtr="0" anchor="ctr" bIns="0" lIns="0" spcFirstLastPara="1" rIns="0" wrap="square" tIns="0">
+              <a:noAutofit/>
+            </a:bodyPr>
+            <a:lstStyle/>
+            <a:p>
+              <a:pPr indent="0" lvl="0" marL="0" rtl="0" algn="l">
+                <a:spcBef>
+                  <a:spcPts val="0"/>
+                </a:spcBef>
+                <a:spcAft>
+                  <a:spcPts val="0"/>
+                </a:spcAft>
+                <a:buNone/>
+              </a:pPr>
+              <a:r>
+                <a:rPr b="1" lang="en-US" sz="1800">
+                  <a:solidFill>
+                    <a:srgbClr val="005088"/>
+                  </a:solidFill>
+                  <a:latin typeface="Merriweather"/>
+                  <a:ea typeface="Merriweather"/>
+                  <a:cs typeface="Merriweather"/>
+                  <a:sym typeface="Merriweather"/>
+                </a:rPr>
+                <a:t>Planteamiento y Lógica</a:t>
+              </a:r>
+              <a:endParaRPr b="1" sz="1800">
+                <a:solidFill>
+                  <a:srgbClr val="005088"/>
+                </a:solidFill>
+                <a:latin typeface="Merriweather"/>
+                <a:ea typeface="Merriweather"/>
+                <a:cs typeface="Merriweather"/>
+                <a:sym typeface="Merriweather"/>
+              </a:endParaRPr>
+            </a:p>
+          </p:txBody>
+        </p:sp>
+        <p:sp>
+          <p:nvSpPr>
+            <p:cNvPr id="480" name="Google Shape;480;p34"/>
+            <p:cNvSpPr txBox="1"/>
+            <p:nvPr/>
+          </p:nvSpPr>
+          <p:spPr>
+            <a:xfrm>
+              <a:off x="4476750" y="2000240"/>
+              <a:ext cx="7048500" cy="3482400"/>
+            </a:xfrm>
+            <a:prstGeom prst="rect">
+              <a:avLst/>
+            </a:prstGeom>
+            <a:noFill/>
+            <a:ln>
+              <a:noFill/>
+            </a:ln>
+          </p:spPr>
+          <p:txBody>
+            <a:bodyPr anchorCtr="0" anchor="t" bIns="0" lIns="0" spcFirstLastPara="1" rIns="0" wrap="square" tIns="0">
+              <a:noAutofit/>
+            </a:bodyPr>
+            <a:lstStyle/>
+            <a:p>
+              <a:pPr indent="-330200" lvl="0" marL="457200" rtl="0" algn="l">
+                <a:lnSpc>
+                  <a:spcPct val="115000"/>
+                </a:lnSpc>
+                <a:spcBef>
+                  <a:spcPts val="0"/>
+                </a:spcBef>
+                <a:spcAft>
+                  <a:spcPts val="0"/>
+                </a:spcAft>
+                <a:buClr>
+                  <a:schemeClr val="dk1"/>
+                </a:buClr>
+                <a:buSzPts val="1600"/>
+                <a:buAutoNum type="arabicPeriod"/>
+              </a:pPr>
+              <a:r>
+                <a:rPr b="1" lang="en-US" sz="1600">
+                  <a:solidFill>
+                    <a:schemeClr val="dk1"/>
+                  </a:solidFill>
+                </a:rPr>
+                <a:t>Estructura Inicial:</a:t>
+              </a:r>
+              <a:r>
+                <a:rPr lang="en-US" sz="1600">
+                  <a:solidFill>
+                    <a:schemeClr val="dk1"/>
+                  </a:solidFill>
+                </a:rPr>
+                <a:t> Crea una matriz dinámica donde cada fila </a:t>
+              </a:r>
+              <a:r>
+                <a:rPr lang="en-US" sz="1600">
+                  <a:solidFill>
+                    <a:schemeClr val="dk1"/>
+                  </a:solidFill>
+                </a:rPr>
+                <a:t>representa</a:t>
+              </a:r>
+              <a:r>
+                <a:rPr lang="en-US" sz="1600">
+                  <a:solidFill>
+                    <a:schemeClr val="dk1"/>
+                  </a:solidFill>
+                </a:rPr>
+                <a:t> un platillo del menú </a:t>
+              </a:r>
+              <a:endParaRPr sz="1600">
+                <a:solidFill>
+                  <a:schemeClr val="dk1"/>
+                </a:solidFill>
+              </a:endParaRPr>
+            </a:p>
+            <a:p>
+              <a:pPr indent="-330200" lvl="0" marL="457200" rtl="0" algn="l">
+                <a:lnSpc>
+                  <a:spcPct val="115000"/>
+                </a:lnSpc>
+                <a:spcBef>
+                  <a:spcPts val="0"/>
+                </a:spcBef>
+                <a:spcAft>
+                  <a:spcPts val="0"/>
+                </a:spcAft>
+                <a:buClr>
+                  <a:schemeClr val="dk1"/>
+                </a:buClr>
+                <a:buSzPts val="1600"/>
+                <a:buAutoNum type="arabicPeriod"/>
+              </a:pPr>
+              <a:r>
+                <a:rPr b="1" lang="en-US" sz="1600">
+                  <a:solidFill>
+                    <a:schemeClr val="dk1"/>
+                  </a:solidFill>
+                </a:rPr>
+                <a:t>Ingreso Masivo:</a:t>
+              </a:r>
+              <a:r>
+                <a:rPr lang="en-US" sz="1600">
+                  <a:solidFill>
+                    <a:schemeClr val="dk1"/>
+                  </a:solidFill>
+                </a:rPr>
+                <a:t> Inicializa el menú agregando consecutivamente tres filas (platillos) </a:t>
+              </a:r>
+              <a:r>
+                <a:rPr lang="en-US" sz="1600">
+                  <a:solidFill>
+                    <a:schemeClr val="dk1"/>
+                  </a:solidFill>
+                </a:rPr>
+                <a:t>con los siguientes datos: </a:t>
+              </a:r>
+              <a:r>
+                <a:rPr lang="en-US" sz="1600">
+                  <a:solidFill>
+                    <a:srgbClr val="188038"/>
+                  </a:solidFill>
+                </a:rPr>
+                <a:t>["Hamburguesa", 155.40]</a:t>
+              </a:r>
+              <a:r>
+                <a:rPr lang="en-US" sz="1600">
+                  <a:solidFill>
+                    <a:schemeClr val="dk1"/>
+                  </a:solidFill>
+                </a:rPr>
+                <a:t>, </a:t>
+              </a:r>
+              <a:r>
+                <a:rPr lang="en-US" sz="1600">
+                  <a:solidFill>
+                    <a:srgbClr val="188038"/>
+                  </a:solidFill>
+                </a:rPr>
+                <a:t>["Papas Fritas", 60.25]</a:t>
+              </a:r>
+              <a:r>
+                <a:rPr lang="en-US" sz="1600">
+                  <a:solidFill>
+                    <a:schemeClr val="dk1"/>
+                  </a:solidFill>
+                </a:rPr>
+                <a:t> y </a:t>
+              </a:r>
+              <a:r>
+                <a:rPr lang="en-US" sz="1600">
+                  <a:solidFill>
+                    <a:srgbClr val="188038"/>
+                  </a:solidFill>
+                </a:rPr>
+                <a:t>["Refresco", 32.50]</a:t>
+              </a:r>
+              <a:r>
+                <a:rPr lang="en-US" sz="1600">
+                  <a:solidFill>
+                    <a:schemeClr val="dk1"/>
+                  </a:solidFill>
+                </a:rPr>
+                <a:t>.</a:t>
+              </a:r>
+              <a:endParaRPr sz="1600">
+                <a:solidFill>
+                  <a:schemeClr val="dk1"/>
+                </a:solidFill>
+              </a:endParaRPr>
+            </a:p>
+            <a:p>
+              <a:pPr indent="-330200" lvl="0" marL="457200" rtl="0" algn="l">
+                <a:lnSpc>
+                  <a:spcPct val="115000"/>
+                </a:lnSpc>
+                <a:spcBef>
+                  <a:spcPts val="0"/>
+                </a:spcBef>
+                <a:spcAft>
+                  <a:spcPts val="0"/>
+                </a:spcAft>
+                <a:buClr>
+                  <a:schemeClr val="dk1"/>
+                </a:buClr>
+                <a:buSzPts val="1600"/>
+                <a:buAutoNum type="arabicPeriod"/>
+              </a:pPr>
+              <a:r>
+                <a:rPr b="1" lang="en-US" sz="1600">
+                  <a:solidFill>
+                    <a:schemeClr val="dk1"/>
+                  </a:solidFill>
+                </a:rPr>
+                <a:t>Actualización de Precios:</a:t>
+              </a:r>
+              <a:r>
+                <a:rPr lang="en-US" sz="1600">
+                  <a:solidFill>
+                    <a:schemeClr val="dk1"/>
+                  </a:solidFill>
+                </a:rPr>
+                <a:t> Debido al incremento en el precio de las papas a nivel nacional, localiza la fila correspondiente a las "Papas Fritas" (asume que conoces su posición física en la matriz) y </a:t>
+              </a:r>
+              <a:r>
+                <a:rPr b="1" lang="en-US" sz="1600">
+                  <a:solidFill>
+                    <a:schemeClr val="dk1"/>
+                  </a:solidFill>
+                </a:rPr>
+                <a:t>actualiza su precio</a:t>
+              </a:r>
+              <a:r>
+                <a:rPr lang="en-US" sz="1600">
+                  <a:solidFill>
+                    <a:schemeClr val="dk1"/>
+                  </a:solidFill>
+                </a:rPr>
+                <a:t> a </a:t>
+              </a:r>
+              <a:r>
+                <a:rPr lang="en-US" sz="1600">
+                  <a:solidFill>
+                    <a:srgbClr val="188038"/>
+                  </a:solidFill>
+                </a:rPr>
+                <a:t>68.00</a:t>
+              </a:r>
+              <a:r>
+                <a:rPr lang="en-US" sz="1600">
+                  <a:solidFill>
+                    <a:schemeClr val="dk1"/>
+                  </a:solidFill>
+                </a:rPr>
+                <a:t> sin alterar el nombre del producto.</a:t>
+              </a:r>
+              <a:endParaRPr sz="1600">
+                <a:solidFill>
+                  <a:schemeClr val="dk1"/>
+                </a:solidFill>
+              </a:endParaRPr>
+            </a:p>
+            <a:p>
+              <a:pPr indent="-330200" lvl="0" marL="457200" rtl="0" algn="l">
+                <a:lnSpc>
+                  <a:spcPct val="115000"/>
+                </a:lnSpc>
+                <a:spcBef>
+                  <a:spcPts val="0"/>
+                </a:spcBef>
+                <a:spcAft>
+                  <a:spcPts val="0"/>
+                </a:spcAft>
+                <a:buClr>
+                  <a:schemeClr val="dk1"/>
+                </a:buClr>
+                <a:buSzPts val="1600"/>
+                <a:buAutoNum type="arabicPeriod"/>
+              </a:pPr>
+              <a:r>
+                <a:rPr b="1" lang="en-US" sz="1600">
+                  <a:solidFill>
+                    <a:schemeClr val="dk1"/>
+                  </a:solidFill>
+                </a:rPr>
+                <a:t>Platillo Agotado:</a:t>
+              </a:r>
+              <a:r>
+                <a:rPr lang="en-US" sz="1600">
+                  <a:solidFill>
+                    <a:schemeClr val="dk1"/>
+                  </a:solidFill>
+                </a:rPr>
+                <a:t> El restaurante reporta que se terminó el pan para hamburguesas. Elimina  "Hamburguesa" del menú.</a:t>
+              </a:r>
+              <a:endParaRPr sz="1600">
+                <a:solidFill>
+                  <a:schemeClr val="dk1"/>
+                </a:solidFill>
+              </a:endParaRPr>
+            </a:p>
+            <a:p>
+              <a:pPr indent="-330200" lvl="0" marL="457200" rtl="0" algn="l">
+                <a:lnSpc>
+                  <a:spcPct val="115000"/>
+                </a:lnSpc>
+                <a:spcBef>
+                  <a:spcPts val="0"/>
+                </a:spcBef>
+                <a:spcAft>
+                  <a:spcPts val="0"/>
+                </a:spcAft>
+                <a:buClr>
+                  <a:schemeClr val="dk1"/>
+                </a:buClr>
+                <a:buSzPts val="1600"/>
+                <a:buAutoNum type="arabicPeriod"/>
+              </a:pPr>
+              <a:r>
+                <a:rPr b="1" lang="en-US" sz="1600">
+                  <a:solidFill>
+                    <a:schemeClr val="dk1"/>
+                  </a:solidFill>
+                </a:rPr>
+                <a:t>Visualización:</a:t>
+              </a:r>
+              <a:r>
+                <a:rPr lang="en-US" sz="1600">
+                  <a:solidFill>
+                    <a:schemeClr val="dk1"/>
+                  </a:solidFill>
+                </a:rPr>
+                <a:t> Imprime ell menú final disponible.</a:t>
+              </a:r>
+              <a:endParaRPr sz="1600">
+                <a:solidFill>
+                  <a:schemeClr val="dk1"/>
+                </a:solidFill>
+              </a:endParaRPr>
+            </a:p>
+            <a:p>
+              <a:pPr indent="0" lvl="0" marL="457200" rtl="0" algn="l">
+                <a:lnSpc>
+                  <a:spcPct val="115000"/>
+                </a:lnSpc>
+                <a:spcBef>
+                  <a:spcPts val="1200"/>
+                </a:spcBef>
+                <a:spcAft>
+                  <a:spcPts val="0"/>
+                </a:spcAft>
+                <a:buNone/>
+              </a:pPr>
+              <a:r>
+                <a:t/>
+              </a:r>
+              <a:endParaRPr b="1" sz="1100">
+                <a:solidFill>
+                  <a:schemeClr val="dk1"/>
+                </a:solidFill>
+              </a:endParaRPr>
+            </a:p>
+            <a:p>
+              <a:pPr indent="0" lvl="0" marL="0" rtl="0" algn="l">
+                <a:spcBef>
+                  <a:spcPts val="1200"/>
+                </a:spcBef>
+                <a:spcAft>
+                  <a:spcPts val="900"/>
+                </a:spcAft>
+                <a:buNone/>
+              </a:pPr>
+              <a:r>
+                <a:t/>
+              </a:r>
+              <a:endParaRPr b="1" sz="1900">
+                <a:solidFill>
+                  <a:srgbClr val="121212"/>
+                </a:solidFill>
+                <a:latin typeface="Arial"/>
+                <a:ea typeface="Arial"/>
+                <a:cs typeface="Arial"/>
+                <a:sym typeface="Arial"/>
+              </a:endParaRPr>
+            </a:p>
+          </p:txBody>
+        </p:sp>
+        <p:sp>
+          <p:nvSpPr>
+            <p:cNvPr id="481" name="Google Shape;481;p34"/>
+            <p:cNvSpPr/>
+            <p:nvPr/>
+          </p:nvSpPr>
+          <p:spPr>
+            <a:xfrm>
+              <a:off x="4476750" y="5609989"/>
+              <a:ext cx="7048500" cy="486000"/>
+            </a:xfrm>
+            <a:prstGeom prst="roundRect">
+              <a:avLst>
+                <a:gd fmla="val 6250" name="adj"/>
+              </a:avLst>
+            </a:prstGeom>
+            <a:solidFill>
+              <a:srgbClr val="E8F0FE"/>
+            </a:solidFill>
+            <a:ln>
+              <a:noFill/>
+            </a:ln>
+          </p:spPr>
+          <p:txBody>
+            <a:bodyPr anchorCtr="0" anchor="ctr" bIns="0" lIns="0" spcFirstLastPara="1" rIns="0" wrap="square" tIns="0">
+              <a:noAutofit/>
+            </a:bodyPr>
+            <a:lstStyle/>
+            <a:p>
+              <a:pPr indent="0" lvl="0" marL="0" rtl="0" algn="l">
+                <a:spcBef>
+                  <a:spcPts val="0"/>
+                </a:spcBef>
+                <a:spcAft>
+                  <a:spcPts val="0"/>
+                </a:spcAft>
+                <a:buNone/>
+              </a:pPr>
+              <a:r>
+                <a:t/>
+              </a:r>
+              <a:endParaRPr/>
+            </a:p>
+          </p:txBody>
+        </p:sp>
+        <p:sp>
+          <p:nvSpPr>
+            <p:cNvPr id="482" name="Google Shape;482;p34"/>
+            <p:cNvSpPr txBox="1"/>
+            <p:nvPr/>
+          </p:nvSpPr>
+          <p:spPr>
+            <a:xfrm>
+              <a:off x="4572000" y="5577877"/>
+              <a:ext cx="6858000" cy="486000"/>
+            </a:xfrm>
+            <a:prstGeom prst="rect">
+              <a:avLst/>
+            </a:prstGeom>
+            <a:noFill/>
+            <a:ln>
+              <a:noFill/>
+            </a:ln>
+          </p:spPr>
+          <p:txBody>
+            <a:bodyPr anchorCtr="0" anchor="ctr" bIns="0" lIns="0" spcFirstLastPara="1" rIns="0" wrap="square" tIns="0">
+              <a:noAutofit/>
+            </a:bodyPr>
+            <a:lstStyle/>
+            <a:p>
+              <a:pPr indent="0" lvl="0" marL="0" rtl="0" algn="l">
+                <a:spcBef>
+                  <a:spcPts val="0"/>
+                </a:spcBef>
+                <a:spcAft>
+                  <a:spcPts val="0"/>
+                </a:spcAft>
+                <a:buClr>
+                  <a:schemeClr val="dk1"/>
+                </a:buClr>
+                <a:buSzPts val="1100"/>
+                <a:buFont typeface="Arial"/>
+                <a:buNone/>
+              </a:pPr>
+              <a:r>
+                <a:rPr b="1" lang="en-US" sz="1100">
+                  <a:solidFill>
+                    <a:srgbClr val="005088"/>
+                  </a:solidFill>
+                  <a:latin typeface="Arial"/>
+                  <a:ea typeface="Arial"/>
+                  <a:cs typeface="Arial"/>
+                  <a:sym typeface="Arial"/>
+                </a:rPr>
+                <a:t>Métodos de Vector a utilizar: </a:t>
+              </a:r>
+              <a:r>
+                <a:rPr lang="en-US" sz="1100">
+                  <a:solidFill>
+                    <a:srgbClr val="188038"/>
+                  </a:solidFill>
+                  <a:latin typeface="Roboto Mono"/>
+                  <a:ea typeface="Roboto Mono"/>
+                  <a:cs typeface="Roboto Mono"/>
+                  <a:sym typeface="Roboto Mono"/>
+                </a:rPr>
+                <a:t>add(E e)</a:t>
+              </a:r>
+              <a:r>
+                <a:rPr lang="en-US" sz="1100">
+                  <a:solidFill>
+                    <a:schemeClr val="dk1"/>
+                  </a:solidFill>
+                </a:rPr>
+                <a:t>, </a:t>
+              </a:r>
+              <a:r>
+                <a:rPr lang="en-US" sz="1100">
+                  <a:solidFill>
+                    <a:srgbClr val="188038"/>
+                  </a:solidFill>
+                  <a:latin typeface="Roboto Mono"/>
+                  <a:ea typeface="Roboto Mono"/>
+                  <a:cs typeface="Roboto Mono"/>
+                  <a:sym typeface="Roboto Mono"/>
+                </a:rPr>
+                <a:t>get(int index)</a:t>
+              </a:r>
+              <a:r>
+                <a:rPr lang="en-US" sz="1100">
+                  <a:solidFill>
+                    <a:schemeClr val="dk1"/>
+                  </a:solidFill>
+                </a:rPr>
+                <a:t>, </a:t>
+              </a:r>
+              <a:r>
+                <a:rPr lang="en-US" sz="1100">
+                  <a:solidFill>
+                    <a:srgbClr val="188038"/>
+                  </a:solidFill>
+                  <a:latin typeface="Roboto Mono"/>
+                  <a:ea typeface="Roboto Mono"/>
+                  <a:cs typeface="Roboto Mono"/>
+                  <a:sym typeface="Roboto Mono"/>
+                </a:rPr>
+                <a:t>set(int index, E element)</a:t>
+              </a:r>
+              <a:r>
+                <a:rPr lang="en-US" sz="1100">
+                  <a:solidFill>
+                    <a:schemeClr val="dk1"/>
+                  </a:solidFill>
+                </a:rPr>
+                <a:t>, </a:t>
+              </a:r>
+              <a:r>
+                <a:rPr lang="en-US" sz="1100">
+                  <a:solidFill>
+                    <a:srgbClr val="188038"/>
+                  </a:solidFill>
+                  <a:latin typeface="Roboto Mono"/>
+                  <a:ea typeface="Roboto Mono"/>
+                  <a:cs typeface="Roboto Mono"/>
+                  <a:sym typeface="Roboto Mono"/>
+                </a:rPr>
+                <a:t>remove(int index)</a:t>
+              </a:r>
+              <a:r>
+                <a:rPr lang="en-US" sz="1100">
+                  <a:solidFill>
+                    <a:schemeClr val="dk1"/>
+                  </a:solidFill>
+                </a:rPr>
+                <a:t> </a:t>
+              </a:r>
+              <a:endParaRPr b="1" sz="1100">
+                <a:solidFill>
+                  <a:schemeClr val="dk1"/>
+                </a:solidFill>
+              </a:endParaRPr>
+            </a:p>
+          </p:txBody>
+        </p:sp>
+      </p:grpSp>
+    </p:spTree>
+  </p:cSld>
+  <p:clrMapOvr>
+    <a:masterClrMapping/>
+  </p:clrMapOvr>
+</p:sld>
+</file>
+
+<file path=ppt/slides/slide22.xml><?xml version="1.0" encoding="utf-8"?>
+<p:sld xmlns:a="http://schemas.openxmlformats.org/drawingml/2006/main" xmlns:r="http://schemas.openxmlformats.org/officeDocument/2006/relationships" xmlns:mc="http://schemas.openxmlformats.org/markup-compatibility/2006" xmlns:mv="urn:schemas-microsoft-com:mac:vml" xmlns:p="http://schemas.openxmlformats.org/presentationml/2006/main" xmlns:c="http://schemas.openxmlformats.org/drawingml/2006/chart" xmlns:dgm="http://schemas.openxmlformats.org/drawingml/2006/diagram" xmlns:o="urn:schemas-microsoft-com:office:office" xmlns:v="urn:schemas-microsoft-com:vml" xmlns:pvml="urn:schemas-microsoft-com:office:powerpoint" xmlns:com="http://schemas.openxmlformats.org/drawingml/2006/compatibility" xmlns:p14="http://schemas.microsoft.com/office/powerpoint/2010/main" xmlns:p15="http://schemas.microsoft.com/office/powerpoint/2012/main" xmlns:ahyp="http://schemas.microsoft.com/office/drawing/2018/hyperlinkcolor">
+  <p:cSld>
+    <p:spTree>
+      <p:nvGrpSpPr>
+        <p:cNvPr id="486" name="Shape 486"/>
+        <p:cNvGrpSpPr/>
+        <p:nvPr/>
+      </p:nvGrpSpPr>
+      <p:grpSpPr>
+        <a:xfrm>
+          <a:off x="0" y="0"/>
+          <a:ext cx="0" cy="0"/>
+          <a:chOff x="0" y="0"/>
+          <a:chExt cx="0" cy="0"/>
+        </a:xfrm>
+      </p:grpSpPr>
+      <p:pic>
+        <p:nvPicPr>
+          <p:cNvPr descr="image.png" id="487" name="Google Shape;487;p35"/>
           <p:cNvPicPr preferRelativeResize="0"/>
           <p:nvPr/>
         </p:nvPicPr>
@@ -26834,7 +28010,7 @@
       </p:pic>
       <p:pic>
         <p:nvPicPr>
-          <p:cNvPr descr="image.png" id="471" name="Google Shape;471;p34"/>
+          <p:cNvPr descr="image.png" id="488" name="Google Shape;488;p35"/>
           <p:cNvPicPr preferRelativeResize="0"/>
           <p:nvPr/>
         </p:nvPicPr>
@@ -26861,7 +28037,7 @@
       </p:pic>
       <p:sp>
         <p:nvSpPr>
-          <p:cNvPr id="472" name="Google Shape;472;p34"/>
+          <p:cNvPr id="489" name="Google Shape;489;p35"/>
           <p:cNvSpPr txBox="1"/>
           <p:nvPr/>
         </p:nvSpPr>
@@ -26927,7 +28103,7 @@
       </p:sp>
       <p:sp>
         <p:nvSpPr>
-          <p:cNvPr id="473" name="Google Shape;473;p34"/>
+          <p:cNvPr id="490" name="Google Shape;490;p35"/>
           <p:cNvSpPr txBox="1"/>
           <p:nvPr/>
         </p:nvSpPr>

--- a/I UNIDAD/Presentaciones/I UNIDAD Programación Básica.pptx
+++ b/I UNIDAD/Presentaciones/I UNIDAD Programación Básica.pptx
@@ -30,37 +30,39 @@
     <p:sldId id="275" r:id="rId25"/>
     <p:sldId id="276" r:id="rId26"/>
     <p:sldId id="277" r:id="rId27"/>
+    <p:sldId id="278" r:id="rId28"/>
+    <p:sldId id="279" r:id="rId29"/>
   </p:sldIdLst>
   <p:sldSz cy="6858000" cx="12192000"/>
   <p:notesSz cx="6858000" cy="9144000"/>
   <p:embeddedFontLst>
     <p:embeddedFont>
       <p:font typeface="DM Sans Medium"/>
-      <p:regular r:id="rId28"/>
-      <p:bold r:id="rId29"/>
-      <p:italic r:id="rId30"/>
-      <p:boldItalic r:id="rId31"/>
+      <p:regular r:id="rId30"/>
+      <p:bold r:id="rId31"/>
+      <p:italic r:id="rId32"/>
+      <p:boldItalic r:id="rId33"/>
     </p:embeddedFont>
     <p:embeddedFont>
       <p:font typeface="Roboto Mono"/>
-      <p:regular r:id="rId32"/>
-      <p:bold r:id="rId33"/>
-      <p:italic r:id="rId34"/>
-      <p:boldItalic r:id="rId35"/>
+      <p:regular r:id="rId34"/>
+      <p:bold r:id="rId35"/>
+      <p:italic r:id="rId36"/>
+      <p:boldItalic r:id="rId37"/>
     </p:embeddedFont>
     <p:embeddedFont>
       <p:font typeface="Merriweather"/>
-      <p:regular r:id="rId36"/>
-      <p:bold r:id="rId37"/>
-      <p:italic r:id="rId38"/>
-      <p:boldItalic r:id="rId39"/>
+      <p:regular r:id="rId38"/>
+      <p:bold r:id="rId39"/>
+      <p:italic r:id="rId40"/>
+      <p:boldItalic r:id="rId41"/>
     </p:embeddedFont>
     <p:embeddedFont>
       <p:font typeface="DM Sans"/>
-      <p:regular r:id="rId40"/>
-      <p:bold r:id="rId41"/>
-      <p:italic r:id="rId42"/>
-      <p:boldItalic r:id="rId43"/>
+      <p:regular r:id="rId42"/>
+      <p:bold r:id="rId43"/>
+      <p:italic r:id="rId44"/>
+      <p:boldItalic r:id="rId45"/>
     </p:embeddedFont>
   </p:embeddedFontLst>
   <p:defaultTextStyle>
@@ -2529,7 +2531,7 @@
       </p:grpSpPr>
       <p:sp>
         <p:nvSpPr>
-          <p:cNvPr id="484" name="Google Shape;484;p12:notes"/>
+          <p:cNvPr id="484" name="Google Shape;484;g3e784154356_0_0:notes"/>
           <p:cNvSpPr txBox="1"/>
           <p:nvPr>
             <p:ph idx="1" type="body"/>
@@ -2576,7 +2578,241 @@
       </p:sp>
       <p:sp>
         <p:nvSpPr>
-          <p:cNvPr id="485" name="Google Shape;485;p12:notes"/>
+          <p:cNvPr id="485" name="Google Shape;485;g3e784154356_0_0:notes"/>
+          <p:cNvSpPr/>
+          <p:nvPr>
+            <p:ph idx="2" type="sldImg"/>
+          </p:nvPr>
+        </p:nvSpPr>
+        <p:spPr>
+          <a:xfrm>
+            <a:off x="1143225" y="685800"/>
+            <a:ext cx="4572300" cy="3429000"/>
+          </a:xfrm>
+          <a:custGeom>
+            <a:rect b="b" l="l" r="r" t="t"/>
+            <a:pathLst>
+              <a:path extrusionOk="0" h="120000" w="120000">
+                <a:moveTo>
+                  <a:pt x="0" y="0"/>
+                </a:moveTo>
+                <a:lnTo>
+                  <a:pt x="120000" y="0"/>
+                </a:lnTo>
+                <a:lnTo>
+                  <a:pt x="120000" y="120000"/>
+                </a:lnTo>
+                <a:lnTo>
+                  <a:pt x="0" y="120000"/>
+                </a:lnTo>
+                <a:close/>
+              </a:path>
+            </a:pathLst>
+          </a:custGeom>
+          <a:noFill/>
+          <a:ln cap="flat" cmpd="sng" w="9525">
+            <a:solidFill>
+              <a:srgbClr val="000000"/>
+            </a:solidFill>
+            <a:prstDash val="solid"/>
+            <a:round/>
+            <a:headEnd len="sm" w="sm" type="none"/>
+            <a:tailEnd len="sm" w="sm" type="none"/>
+          </a:ln>
+        </p:spPr>
+      </p:sp>
+    </p:spTree>
+  </p:cSld>
+  <p:clrMapOvr>
+    <a:masterClrMapping/>
+  </p:clrMapOvr>
+</p:notes>
+</file>
+
+<file path=ppt/notesSlides/notesSlide23.xml><?xml version="1.0" encoding="utf-8"?>
+<p:notes xmlns:a="http://schemas.openxmlformats.org/drawingml/2006/main" xmlns:r="http://schemas.openxmlformats.org/officeDocument/2006/relationships" xmlns:mc="http://schemas.openxmlformats.org/markup-compatibility/2006" xmlns:mv="urn:schemas-microsoft-com:mac:vml" xmlns:p="http://schemas.openxmlformats.org/presentationml/2006/main" xmlns:c="http://schemas.openxmlformats.org/drawingml/2006/chart" xmlns:dgm="http://schemas.openxmlformats.org/drawingml/2006/diagram" xmlns:o="urn:schemas-microsoft-com:office:office" xmlns:v="urn:schemas-microsoft-com:vml" xmlns:pvml="urn:schemas-microsoft-com:office:powerpoint" xmlns:com="http://schemas.openxmlformats.org/drawingml/2006/compatibility" xmlns:p14="http://schemas.microsoft.com/office/powerpoint/2010/main" xmlns:p15="http://schemas.microsoft.com/office/powerpoint/2012/main" xmlns:ahyp="http://schemas.microsoft.com/office/drawing/2018/hyperlinkcolor" showMasterPhAnim="0" showMasterSp="0">
+  <p:cSld>
+    <p:spTree>
+      <p:nvGrpSpPr>
+        <p:cNvPr id="500" name="Shape 500"/>
+        <p:cNvGrpSpPr/>
+        <p:nvPr/>
+      </p:nvGrpSpPr>
+      <p:grpSpPr>
+        <a:xfrm>
+          <a:off x="0" y="0"/>
+          <a:ext cx="0" cy="0"/>
+          <a:chOff x="0" y="0"/>
+          <a:chExt cx="0" cy="0"/>
+        </a:xfrm>
+      </p:grpSpPr>
+      <p:sp>
+        <p:nvSpPr>
+          <p:cNvPr id="501" name="Google Shape;501;g3e784154356_0_16:notes"/>
+          <p:cNvSpPr txBox="1"/>
+          <p:nvPr>
+            <p:ph idx="1" type="body"/>
+          </p:nvPr>
+        </p:nvSpPr>
+        <p:spPr>
+          <a:xfrm>
+            <a:off x="685800" y="4343400"/>
+            <a:ext cx="5486400" cy="4114800"/>
+          </a:xfrm>
+          <a:prstGeom prst="rect">
+            <a:avLst/>
+          </a:prstGeom>
+          <a:noFill/>
+          <a:ln>
+            <a:noFill/>
+          </a:ln>
+        </p:spPr>
+        <p:txBody>
+          <a:bodyPr anchorCtr="0" anchor="t" bIns="91425" lIns="91425" spcFirstLastPara="1" rIns="91425" wrap="square" tIns="91425">
+            <a:noAutofit/>
+          </a:bodyPr>
+          <a:lstStyle/>
+          <a:p>
+            <a:pPr indent="0" lvl="0" marL="0" rtl="0" algn="l">
+              <a:lnSpc>
+                <a:spcPct val="100000"/>
+              </a:lnSpc>
+              <a:spcBef>
+                <a:spcPts val="0"/>
+              </a:spcBef>
+              <a:spcAft>
+                <a:spcPts val="0"/>
+              </a:spcAft>
+              <a:buSzPts val="1100"/>
+              <a:buNone/>
+            </a:pPr>
+            <a:r>
+              <a:t/>
+            </a:r>
+            <a:endParaRPr/>
+          </a:p>
+        </p:txBody>
+      </p:sp>
+      <p:sp>
+        <p:nvSpPr>
+          <p:cNvPr id="502" name="Google Shape;502;g3e784154356_0_16:notes"/>
+          <p:cNvSpPr/>
+          <p:nvPr>
+            <p:ph idx="2" type="sldImg"/>
+          </p:nvPr>
+        </p:nvSpPr>
+        <p:spPr>
+          <a:xfrm>
+            <a:off x="1143225" y="685800"/>
+            <a:ext cx="4572300" cy="3429000"/>
+          </a:xfrm>
+          <a:custGeom>
+            <a:rect b="b" l="l" r="r" t="t"/>
+            <a:pathLst>
+              <a:path extrusionOk="0" h="120000" w="120000">
+                <a:moveTo>
+                  <a:pt x="0" y="0"/>
+                </a:moveTo>
+                <a:lnTo>
+                  <a:pt x="120000" y="0"/>
+                </a:lnTo>
+                <a:lnTo>
+                  <a:pt x="120000" y="120000"/>
+                </a:lnTo>
+                <a:lnTo>
+                  <a:pt x="0" y="120000"/>
+                </a:lnTo>
+                <a:close/>
+              </a:path>
+            </a:pathLst>
+          </a:custGeom>
+          <a:noFill/>
+          <a:ln cap="flat" cmpd="sng" w="9525">
+            <a:solidFill>
+              <a:srgbClr val="000000"/>
+            </a:solidFill>
+            <a:prstDash val="solid"/>
+            <a:round/>
+            <a:headEnd len="sm" w="sm" type="none"/>
+            <a:tailEnd len="sm" w="sm" type="none"/>
+          </a:ln>
+        </p:spPr>
+      </p:sp>
+    </p:spTree>
+  </p:cSld>
+  <p:clrMapOvr>
+    <a:masterClrMapping/>
+  </p:clrMapOvr>
+</p:notes>
+</file>
+
+<file path=ppt/notesSlides/notesSlide24.xml><?xml version="1.0" encoding="utf-8"?>
+<p:notes xmlns:a="http://schemas.openxmlformats.org/drawingml/2006/main" xmlns:r="http://schemas.openxmlformats.org/officeDocument/2006/relationships" xmlns:mc="http://schemas.openxmlformats.org/markup-compatibility/2006" xmlns:mv="urn:schemas-microsoft-com:mac:vml" xmlns:p="http://schemas.openxmlformats.org/presentationml/2006/main" xmlns:c="http://schemas.openxmlformats.org/drawingml/2006/chart" xmlns:dgm="http://schemas.openxmlformats.org/drawingml/2006/diagram" xmlns:o="urn:schemas-microsoft-com:office:office" xmlns:v="urn:schemas-microsoft-com:vml" xmlns:pvml="urn:schemas-microsoft-com:office:powerpoint" xmlns:com="http://schemas.openxmlformats.org/drawingml/2006/compatibility" xmlns:p14="http://schemas.microsoft.com/office/powerpoint/2010/main" xmlns:p15="http://schemas.microsoft.com/office/powerpoint/2012/main" xmlns:ahyp="http://schemas.microsoft.com/office/drawing/2018/hyperlinkcolor" showMasterPhAnim="0" showMasterSp="0">
+  <p:cSld>
+    <p:spTree>
+      <p:nvGrpSpPr>
+        <p:cNvPr id="517" name="Shape 517"/>
+        <p:cNvGrpSpPr/>
+        <p:nvPr/>
+      </p:nvGrpSpPr>
+      <p:grpSpPr>
+        <a:xfrm>
+          <a:off x="0" y="0"/>
+          <a:ext cx="0" cy="0"/>
+          <a:chOff x="0" y="0"/>
+          <a:chExt cx="0" cy="0"/>
+        </a:xfrm>
+      </p:grpSpPr>
+      <p:sp>
+        <p:nvSpPr>
+          <p:cNvPr id="518" name="Google Shape;518;p12:notes"/>
+          <p:cNvSpPr txBox="1"/>
+          <p:nvPr>
+            <p:ph idx="1" type="body"/>
+          </p:nvPr>
+        </p:nvSpPr>
+        <p:spPr>
+          <a:xfrm>
+            <a:off x="685800" y="4343400"/>
+            <a:ext cx="5486400" cy="4114800"/>
+          </a:xfrm>
+          <a:prstGeom prst="rect">
+            <a:avLst/>
+          </a:prstGeom>
+          <a:noFill/>
+          <a:ln>
+            <a:noFill/>
+          </a:ln>
+        </p:spPr>
+        <p:txBody>
+          <a:bodyPr anchorCtr="0" anchor="t" bIns="91425" lIns="91425" spcFirstLastPara="1" rIns="91425" wrap="square" tIns="91425">
+            <a:noAutofit/>
+          </a:bodyPr>
+          <a:lstStyle/>
+          <a:p>
+            <a:pPr indent="0" lvl="0" marL="0" rtl="0" algn="l">
+              <a:lnSpc>
+                <a:spcPct val="100000"/>
+              </a:lnSpc>
+              <a:spcBef>
+                <a:spcPts val="0"/>
+              </a:spcBef>
+              <a:spcAft>
+                <a:spcPts val="0"/>
+              </a:spcAft>
+              <a:buSzPts val="1100"/>
+              <a:buNone/>
+            </a:pPr>
+            <a:r>
+              <a:t/>
+            </a:r>
+            <a:endParaRPr/>
+          </a:p>
+        </p:txBody>
+      </p:sp>
+      <p:sp>
+        <p:nvSpPr>
+          <p:cNvPr id="519" name="Google Shape;519;p12:notes"/>
           <p:cNvSpPr/>
           <p:nvPr>
             <p:ph idx="2" type="sldImg"/>
@@ -27967,6 +28203,18 @@
 <file path=ppt/slides/slide22.xml><?xml version="1.0" encoding="utf-8"?>
 <p:sld xmlns:a="http://schemas.openxmlformats.org/drawingml/2006/main" xmlns:r="http://schemas.openxmlformats.org/officeDocument/2006/relationships" xmlns:mc="http://schemas.openxmlformats.org/markup-compatibility/2006" xmlns:mv="urn:schemas-microsoft-com:mac:vml" xmlns:p="http://schemas.openxmlformats.org/presentationml/2006/main" xmlns:c="http://schemas.openxmlformats.org/drawingml/2006/chart" xmlns:dgm="http://schemas.openxmlformats.org/drawingml/2006/diagram" xmlns:o="urn:schemas-microsoft-com:office:office" xmlns:v="urn:schemas-microsoft-com:vml" xmlns:pvml="urn:schemas-microsoft-com:office:powerpoint" xmlns:com="http://schemas.openxmlformats.org/drawingml/2006/compatibility" xmlns:p14="http://schemas.microsoft.com/office/powerpoint/2010/main" xmlns:p15="http://schemas.microsoft.com/office/powerpoint/2012/main" xmlns:ahyp="http://schemas.microsoft.com/office/drawing/2018/hyperlinkcolor">
   <p:cSld>
+    <p:bg>
+      <p:bgPr>
+        <a:blipFill>
+          <a:blip r:embed="rId3">
+            <a:alphaModFix/>
+          </a:blip>
+          <a:stretch>
+            <a:fillRect/>
+          </a:stretch>
+        </a:blipFill>
+      </p:bgPr>
+    </p:bg>
     <p:spTree>
       <p:nvGrpSpPr>
         <p:cNvPr id="486" name="Shape 486"/>
@@ -27983,7 +28231,2025 @@
       </p:grpSpPr>
       <p:pic>
         <p:nvPicPr>
-          <p:cNvPr descr="image.png" id="487" name="Google Shape;487;p35"/>
+          <p:cNvPr id="487" name="Google Shape;487;p35"/>
+          <p:cNvPicPr preferRelativeResize="0"/>
+          <p:nvPr/>
+        </p:nvPicPr>
+        <p:blipFill rotWithShape="1">
+          <a:blip r:embed="rId4">
+            <a:alphaModFix/>
+          </a:blip>
+          <a:srcRect b="0" l="0" r="0" t="0"/>
+          <a:stretch/>
+        </p:blipFill>
+        <p:spPr>
+          <a:xfrm>
+            <a:off x="0" y="0"/>
+            <a:ext cx="12192000" cy="6858000"/>
+          </a:xfrm>
+          <a:prstGeom prst="rect">
+            <a:avLst/>
+          </a:prstGeom>
+          <a:noFill/>
+          <a:ln>
+            <a:noFill/>
+          </a:ln>
+        </p:spPr>
+      </p:pic>
+      <p:sp>
+        <p:nvSpPr>
+          <p:cNvPr id="488" name="Google Shape;488;p35"/>
+          <p:cNvSpPr/>
+          <p:nvPr/>
+        </p:nvSpPr>
+        <p:spPr>
+          <a:xfrm>
+            <a:off x="0" y="0"/>
+            <a:ext cx="12192000" cy="952500"/>
+          </a:xfrm>
+          <a:prstGeom prst="rect">
+            <a:avLst/>
+          </a:prstGeom>
+          <a:solidFill>
+            <a:srgbClr val="FFFFFF">
+              <a:alpha val="60000"/>
+            </a:srgbClr>
+          </a:solidFill>
+          <a:ln>
+            <a:noFill/>
+          </a:ln>
+        </p:spPr>
+        <p:txBody>
+          <a:bodyPr anchorCtr="0" anchor="ctr" bIns="0" lIns="0" spcFirstLastPara="1" rIns="0" wrap="square" tIns="0">
+            <a:noAutofit/>
+          </a:bodyPr>
+          <a:lstStyle/>
+          <a:p>
+            <a:pPr indent="0" lvl="0" marL="0" rtl="0" algn="l">
+              <a:spcBef>
+                <a:spcPts val="0"/>
+              </a:spcBef>
+              <a:spcAft>
+                <a:spcPts val="0"/>
+              </a:spcAft>
+              <a:buNone/>
+            </a:pPr>
+            <a:r>
+              <a:t/>
+            </a:r>
+            <a:endParaRPr/>
+          </a:p>
+        </p:txBody>
+      </p:sp>
+      <p:sp>
+        <p:nvSpPr>
+          <p:cNvPr id="489" name="Google Shape;489;p35"/>
+          <p:cNvSpPr txBox="1"/>
+          <p:nvPr/>
+        </p:nvSpPr>
+        <p:spPr>
+          <a:xfrm>
+            <a:off x="476250" y="67575"/>
+            <a:ext cx="11239500" cy="1074300"/>
+          </a:xfrm>
+          <a:prstGeom prst="rect">
+            <a:avLst/>
+          </a:prstGeom>
+          <a:noFill/>
+          <a:ln>
+            <a:noFill/>
+          </a:ln>
+        </p:spPr>
+        <p:txBody>
+          <a:bodyPr anchorCtr="0" anchor="ctr" bIns="0" lIns="0" spcFirstLastPara="1" rIns="0" wrap="square" tIns="0">
+            <a:noAutofit/>
+          </a:bodyPr>
+          <a:lstStyle/>
+          <a:p>
+            <a:pPr indent="0" lvl="0" marL="0" rtl="0" algn="l">
+              <a:spcBef>
+                <a:spcPts val="0"/>
+              </a:spcBef>
+              <a:spcAft>
+                <a:spcPts val="0"/>
+              </a:spcAft>
+              <a:buNone/>
+            </a:pPr>
+            <a:r>
+              <a:rPr b="1" lang="en-US" sz="3200">
+                <a:solidFill>
+                  <a:srgbClr val="005088"/>
+                </a:solidFill>
+                <a:latin typeface="Merriweather"/>
+                <a:ea typeface="Merriweather"/>
+                <a:cs typeface="Merriweather"/>
+                <a:sym typeface="Merriweather"/>
+              </a:rPr>
+              <a:t>Ejemplo 2: </a:t>
+            </a:r>
+            <a:r>
+              <a:rPr b="1" lang="en-US" sz="3200">
+                <a:solidFill>
+                  <a:srgbClr val="005088"/>
+                </a:solidFill>
+                <a:latin typeface="Merriweather"/>
+                <a:ea typeface="Merriweather"/>
+                <a:cs typeface="Merriweather"/>
+                <a:sym typeface="Merriweather"/>
+              </a:rPr>
+              <a:t>Equipaje del Aeropuerto</a:t>
+            </a:r>
+            <a:endParaRPr b="1" sz="3200">
+              <a:solidFill>
+                <a:srgbClr val="005088"/>
+              </a:solidFill>
+              <a:latin typeface="Merriweather"/>
+              <a:ea typeface="Merriweather"/>
+              <a:cs typeface="Merriweather"/>
+              <a:sym typeface="Merriweather"/>
+            </a:endParaRPr>
+          </a:p>
+        </p:txBody>
+      </p:sp>
+      <p:sp>
+        <p:nvSpPr>
+          <p:cNvPr id="490" name="Google Shape;490;p35"/>
+          <p:cNvSpPr/>
+          <p:nvPr/>
+        </p:nvSpPr>
+        <p:spPr>
+          <a:xfrm>
+            <a:off x="476250" y="1333500"/>
+            <a:ext cx="3619500" cy="4953000"/>
+          </a:xfrm>
+          <a:prstGeom prst="roundRect">
+            <a:avLst>
+              <a:gd fmla="val 2631" name="adj"/>
+            </a:avLst>
+          </a:prstGeom>
+          <a:solidFill>
+            <a:srgbClr val="FFFFFF"/>
+          </a:solidFill>
+          <a:ln cap="flat" cmpd="sng" w="19050">
+            <a:solidFill>
+              <a:srgbClr val="005088"/>
+            </a:solidFill>
+            <a:prstDash val="solid"/>
+            <a:round/>
+            <a:headEnd len="sm" w="sm" type="none"/>
+            <a:tailEnd len="sm" w="sm" type="none"/>
+          </a:ln>
+        </p:spPr>
+        <p:txBody>
+          <a:bodyPr anchorCtr="0" anchor="ctr" bIns="0" lIns="0" spcFirstLastPara="1" rIns="0" wrap="square" tIns="0">
+            <a:noAutofit/>
+          </a:bodyPr>
+          <a:lstStyle/>
+          <a:p>
+            <a:pPr indent="0" lvl="0" marL="0" rtl="0" algn="l">
+              <a:spcBef>
+                <a:spcPts val="0"/>
+              </a:spcBef>
+              <a:spcAft>
+                <a:spcPts val="0"/>
+              </a:spcAft>
+              <a:buNone/>
+            </a:pPr>
+            <a:r>
+              <a:t/>
+            </a:r>
+            <a:endParaRPr/>
+          </a:p>
+        </p:txBody>
+      </p:sp>
+      <p:grpSp>
+        <p:nvGrpSpPr>
+          <p:cNvPr id="491" name="Google Shape;491;p35"/>
+          <p:cNvGrpSpPr/>
+          <p:nvPr/>
+        </p:nvGrpSpPr>
+        <p:grpSpPr>
+          <a:xfrm>
+            <a:off x="666750" y="1524000"/>
+            <a:ext cx="3238500" cy="4572150"/>
+            <a:chOff x="666750" y="1524000"/>
+            <a:chExt cx="3238500" cy="4572150"/>
+          </a:xfrm>
+        </p:grpSpPr>
+        <p:sp>
+          <p:nvSpPr>
+            <p:cNvPr id="492" name="Google Shape;492;p35"/>
+            <p:cNvSpPr txBox="1"/>
+            <p:nvPr/>
+          </p:nvSpPr>
+          <p:spPr>
+            <a:xfrm>
+              <a:off x="666750" y="1524000"/>
+              <a:ext cx="3238500" cy="381000"/>
+            </a:xfrm>
+            <a:prstGeom prst="rect">
+              <a:avLst/>
+            </a:prstGeom>
+            <a:noFill/>
+            <a:ln>
+              <a:noFill/>
+            </a:ln>
+          </p:spPr>
+          <p:txBody>
+            <a:bodyPr anchorCtr="0" anchor="ctr" bIns="0" lIns="0" spcFirstLastPara="1" rIns="0" wrap="square" tIns="0">
+              <a:noAutofit/>
+            </a:bodyPr>
+            <a:lstStyle/>
+            <a:p>
+              <a:pPr indent="0" lvl="0" marL="0" rtl="0" algn="l">
+                <a:spcBef>
+                  <a:spcPts val="0"/>
+                </a:spcBef>
+                <a:spcAft>
+                  <a:spcPts val="0"/>
+                </a:spcAft>
+                <a:buNone/>
+              </a:pPr>
+              <a:r>
+                <a:rPr b="1" lang="en-US" sz="1800">
+                  <a:solidFill>
+                    <a:srgbClr val="005088"/>
+                  </a:solidFill>
+                  <a:latin typeface="Merriweather"/>
+                  <a:ea typeface="Merriweather"/>
+                  <a:cs typeface="Merriweather"/>
+                  <a:sym typeface="Merriweather"/>
+                </a:rPr>
+                <a:t>Contexto</a:t>
+              </a:r>
+              <a:endParaRPr b="1" sz="1800">
+                <a:solidFill>
+                  <a:srgbClr val="005088"/>
+                </a:solidFill>
+                <a:latin typeface="Merriweather"/>
+                <a:ea typeface="Merriweather"/>
+                <a:cs typeface="Merriweather"/>
+                <a:sym typeface="Merriweather"/>
+              </a:endParaRPr>
+            </a:p>
+          </p:txBody>
+        </p:sp>
+        <p:sp>
+          <p:nvSpPr>
+            <p:cNvPr id="493" name="Google Shape;493;p35"/>
+            <p:cNvSpPr txBox="1"/>
+            <p:nvPr/>
+          </p:nvSpPr>
+          <p:spPr>
+            <a:xfrm>
+              <a:off x="666750" y="2000250"/>
+              <a:ext cx="3238500" cy="4095900"/>
+            </a:xfrm>
+            <a:prstGeom prst="rect">
+              <a:avLst/>
+            </a:prstGeom>
+            <a:noFill/>
+            <a:ln>
+              <a:noFill/>
+            </a:ln>
+          </p:spPr>
+          <p:txBody>
+            <a:bodyPr anchorCtr="0" anchor="t" bIns="0" lIns="0" spcFirstLastPara="1" rIns="0" wrap="square" tIns="0">
+              <a:noAutofit/>
+            </a:bodyPr>
+            <a:lstStyle/>
+            <a:p>
+              <a:pPr indent="0" lvl="0" marL="0" rtl="0" algn="l">
+                <a:lnSpc>
+                  <a:spcPct val="115000"/>
+                </a:lnSpc>
+                <a:spcBef>
+                  <a:spcPts val="1200"/>
+                </a:spcBef>
+                <a:spcAft>
+                  <a:spcPts val="0"/>
+                </a:spcAft>
+                <a:buNone/>
+              </a:pPr>
+              <a:r>
+                <a:rPr lang="en-US" sz="1700">
+                  <a:solidFill>
+                    <a:schemeClr val="dk1"/>
+                  </a:solidFill>
+                </a:rPr>
+                <a:t>Cada maleta que pasa por el escáner genera una fila en una matriz con los datos del pasajero, el peso y si contiene algún artículo prohibido. Tu trabajo es programar el sistema de alertas que detecte equipaje sospechoso o pasajeros específicos</a:t>
+              </a:r>
+              <a:endParaRPr sz="1700">
+                <a:solidFill>
+                  <a:schemeClr val="dk1"/>
+                </a:solidFill>
+              </a:endParaRPr>
+            </a:p>
+            <a:p>
+              <a:pPr indent="0" lvl="0" marL="0" rtl="0" algn="l">
+                <a:lnSpc>
+                  <a:spcPct val="115000"/>
+                </a:lnSpc>
+                <a:spcBef>
+                  <a:spcPts val="1200"/>
+                </a:spcBef>
+                <a:spcAft>
+                  <a:spcPts val="1200"/>
+                </a:spcAft>
+                <a:buNone/>
+              </a:pPr>
+              <a:r>
+                <a:t/>
+              </a:r>
+              <a:endParaRPr sz="1900">
+                <a:solidFill>
+                  <a:schemeClr val="dk1"/>
+                </a:solidFill>
+              </a:endParaRPr>
+            </a:p>
+          </p:txBody>
+        </p:sp>
+      </p:grpSp>
+      <p:sp>
+        <p:nvSpPr>
+          <p:cNvPr id="494" name="Google Shape;494;p35"/>
+          <p:cNvSpPr/>
+          <p:nvPr/>
+        </p:nvSpPr>
+        <p:spPr>
+          <a:xfrm>
+            <a:off x="4286250" y="1333500"/>
+            <a:ext cx="7429500" cy="4953000"/>
+          </a:xfrm>
+          <a:prstGeom prst="roundRect">
+            <a:avLst>
+              <a:gd fmla="val 1923" name="adj"/>
+            </a:avLst>
+          </a:prstGeom>
+          <a:solidFill>
+            <a:srgbClr val="FFFFFF">
+              <a:alpha val="90000"/>
+            </a:srgbClr>
+          </a:solidFill>
+          <a:ln cap="flat" cmpd="sng" w="9525">
+            <a:solidFill>
+              <a:srgbClr val="005088"/>
+            </a:solidFill>
+            <a:prstDash val="solid"/>
+            <a:round/>
+            <a:headEnd len="sm" w="sm" type="none"/>
+            <a:tailEnd len="sm" w="sm" type="none"/>
+          </a:ln>
+        </p:spPr>
+        <p:txBody>
+          <a:bodyPr anchorCtr="0" anchor="ctr" bIns="0" lIns="0" spcFirstLastPara="1" rIns="0" wrap="square" tIns="0">
+            <a:noAutofit/>
+          </a:bodyPr>
+          <a:lstStyle/>
+          <a:p>
+            <a:pPr indent="0" lvl="0" marL="0" rtl="0" algn="l">
+              <a:spcBef>
+                <a:spcPts val="0"/>
+              </a:spcBef>
+              <a:spcAft>
+                <a:spcPts val="0"/>
+              </a:spcAft>
+              <a:buNone/>
+            </a:pPr>
+            <a:r>
+              <a:t/>
+            </a:r>
+            <a:endParaRPr/>
+          </a:p>
+        </p:txBody>
+      </p:sp>
+      <p:grpSp>
+        <p:nvGrpSpPr>
+          <p:cNvPr id="495" name="Google Shape;495;p35"/>
+          <p:cNvGrpSpPr/>
+          <p:nvPr/>
+        </p:nvGrpSpPr>
+        <p:grpSpPr>
+          <a:xfrm>
+            <a:off x="4476750" y="1428751"/>
+            <a:ext cx="7048500" cy="4762641"/>
+            <a:chOff x="4476750" y="1524000"/>
+            <a:chExt cx="7048500" cy="4571989"/>
+          </a:xfrm>
+        </p:grpSpPr>
+        <p:sp>
+          <p:nvSpPr>
+            <p:cNvPr id="496" name="Google Shape;496;p35"/>
+            <p:cNvSpPr txBox="1"/>
+            <p:nvPr/>
+          </p:nvSpPr>
+          <p:spPr>
+            <a:xfrm>
+              <a:off x="4476750" y="1524000"/>
+              <a:ext cx="7048500" cy="381000"/>
+            </a:xfrm>
+            <a:prstGeom prst="rect">
+              <a:avLst/>
+            </a:prstGeom>
+            <a:noFill/>
+            <a:ln>
+              <a:noFill/>
+            </a:ln>
+          </p:spPr>
+          <p:txBody>
+            <a:bodyPr anchorCtr="0" anchor="ctr" bIns="0" lIns="0" spcFirstLastPara="1" rIns="0" wrap="square" tIns="0">
+              <a:noAutofit/>
+            </a:bodyPr>
+            <a:lstStyle/>
+            <a:p>
+              <a:pPr indent="0" lvl="0" marL="0" rtl="0" algn="l">
+                <a:spcBef>
+                  <a:spcPts val="0"/>
+                </a:spcBef>
+                <a:spcAft>
+                  <a:spcPts val="0"/>
+                </a:spcAft>
+                <a:buNone/>
+              </a:pPr>
+              <a:r>
+                <a:rPr b="1" lang="en-US" sz="1800">
+                  <a:solidFill>
+                    <a:srgbClr val="005088"/>
+                  </a:solidFill>
+                  <a:latin typeface="Merriweather"/>
+                  <a:ea typeface="Merriweather"/>
+                  <a:cs typeface="Merriweather"/>
+                  <a:sym typeface="Merriweather"/>
+                </a:rPr>
+                <a:t>Planteamiento y Lógica</a:t>
+              </a:r>
+              <a:endParaRPr b="1" sz="1800">
+                <a:solidFill>
+                  <a:srgbClr val="005088"/>
+                </a:solidFill>
+                <a:latin typeface="Merriweather"/>
+                <a:ea typeface="Merriweather"/>
+                <a:cs typeface="Merriweather"/>
+                <a:sym typeface="Merriweather"/>
+              </a:endParaRPr>
+            </a:p>
+          </p:txBody>
+        </p:sp>
+        <p:sp>
+          <p:nvSpPr>
+            <p:cNvPr id="497" name="Google Shape;497;p35"/>
+            <p:cNvSpPr txBox="1"/>
+            <p:nvPr/>
+          </p:nvSpPr>
+          <p:spPr>
+            <a:xfrm>
+              <a:off x="4476750" y="2000240"/>
+              <a:ext cx="7048500" cy="3482400"/>
+            </a:xfrm>
+            <a:prstGeom prst="rect">
+              <a:avLst/>
+            </a:prstGeom>
+            <a:noFill/>
+            <a:ln>
+              <a:noFill/>
+            </a:ln>
+          </p:spPr>
+          <p:txBody>
+            <a:bodyPr anchorCtr="0" anchor="t" bIns="0" lIns="0" spcFirstLastPara="1" rIns="0" wrap="square" tIns="0">
+              <a:noAutofit/>
+            </a:bodyPr>
+            <a:lstStyle/>
+            <a:p>
+              <a:pPr indent="-323850" lvl="0" marL="457200" rtl="0" algn="l">
+                <a:lnSpc>
+                  <a:spcPct val="115000"/>
+                </a:lnSpc>
+                <a:spcBef>
+                  <a:spcPts val="0"/>
+                </a:spcBef>
+                <a:spcAft>
+                  <a:spcPts val="0"/>
+                </a:spcAft>
+                <a:buClr>
+                  <a:schemeClr val="dk1"/>
+                </a:buClr>
+                <a:buSzPts val="1500"/>
+                <a:buAutoNum type="arabicPeriod"/>
+              </a:pPr>
+              <a:r>
+                <a:rPr lang="en-US" sz="1500">
+                  <a:solidFill>
+                    <a:schemeClr val="dk1"/>
+                  </a:solidFill>
+                </a:rPr>
+                <a:t>Estructura Dinámica: Instancia una matriz donde se registren las maletas aprobadas en la banda bajo el formato: [Código de Boleto, Nombre del Pasajero, Estado del Filtro].</a:t>
+              </a:r>
+              <a:endParaRPr sz="1500">
+                <a:solidFill>
+                  <a:schemeClr val="dk1"/>
+                </a:solidFill>
+              </a:endParaRPr>
+            </a:p>
+            <a:p>
+              <a:pPr indent="-323850" lvl="0" marL="457200" rtl="0" algn="l">
+                <a:lnSpc>
+                  <a:spcPct val="115000"/>
+                </a:lnSpc>
+                <a:spcBef>
+                  <a:spcPts val="0"/>
+                </a:spcBef>
+                <a:spcAft>
+                  <a:spcPts val="0"/>
+                </a:spcAft>
+                <a:buClr>
+                  <a:schemeClr val="dk1"/>
+                </a:buClr>
+                <a:buSzPts val="1500"/>
+                <a:buAutoNum type="arabicPeriod"/>
+              </a:pPr>
+              <a:r>
+                <a:rPr lang="en-US" sz="1500">
+                  <a:solidFill>
+                    <a:schemeClr val="dk1"/>
+                  </a:solidFill>
+                </a:rPr>
+                <a:t>Inserta los datos de los primeros pasajeros en la matriz:</a:t>
+              </a:r>
+              <a:endParaRPr sz="1500">
+                <a:solidFill>
+                  <a:schemeClr val="dk1"/>
+                </a:solidFill>
+              </a:endParaRPr>
+            </a:p>
+            <a:p>
+              <a:pPr indent="0" lvl="0" marL="457200" rtl="0" algn="l">
+                <a:lnSpc>
+                  <a:spcPct val="115000"/>
+                </a:lnSpc>
+                <a:spcBef>
+                  <a:spcPts val="0"/>
+                </a:spcBef>
+                <a:spcAft>
+                  <a:spcPts val="0"/>
+                </a:spcAft>
+                <a:buNone/>
+              </a:pPr>
+              <a:r>
+                <a:rPr lang="en-US" sz="1500">
+                  <a:solidFill>
+                    <a:schemeClr val="dk1"/>
+                  </a:solidFill>
+                </a:rPr>
+                <a:t>Fila 0: ["TK-401", "Carlos Mendoza", "Aprobado"]</a:t>
+              </a:r>
+              <a:endParaRPr sz="1500">
+                <a:solidFill>
+                  <a:schemeClr val="dk1"/>
+                </a:solidFill>
+              </a:endParaRPr>
+            </a:p>
+            <a:p>
+              <a:pPr indent="0" lvl="0" marL="457200" rtl="0" algn="l">
+                <a:lnSpc>
+                  <a:spcPct val="115000"/>
+                </a:lnSpc>
+                <a:spcBef>
+                  <a:spcPts val="0"/>
+                </a:spcBef>
+                <a:spcAft>
+                  <a:spcPts val="0"/>
+                </a:spcAft>
+                <a:buNone/>
+              </a:pPr>
+              <a:r>
+                <a:rPr lang="en-US" sz="1500">
+                  <a:solidFill>
+                    <a:schemeClr val="dk1"/>
+                  </a:solidFill>
+                </a:rPr>
+                <a:t>Fila 1: ["TK-402", "Elena Ruiz", "Bajo Revisión"]</a:t>
+              </a:r>
+              <a:endParaRPr sz="1500">
+                <a:solidFill>
+                  <a:schemeClr val="dk1"/>
+                </a:solidFill>
+              </a:endParaRPr>
+            </a:p>
+            <a:p>
+              <a:pPr indent="0" lvl="0" marL="457200" rtl="0" algn="l">
+                <a:lnSpc>
+                  <a:spcPct val="115000"/>
+                </a:lnSpc>
+                <a:spcBef>
+                  <a:spcPts val="0"/>
+                </a:spcBef>
+                <a:spcAft>
+                  <a:spcPts val="0"/>
+                </a:spcAft>
+                <a:buNone/>
+              </a:pPr>
+              <a:r>
+                <a:rPr lang="en-US" sz="1500">
+                  <a:solidFill>
+                    <a:schemeClr val="dk1"/>
+                  </a:solidFill>
+                </a:rPr>
+                <a:t>Fila 2: ["TK-403", "Luis Duarte", "Aprobado"]</a:t>
+              </a:r>
+              <a:endParaRPr sz="1500">
+                <a:solidFill>
+                  <a:schemeClr val="dk1"/>
+                </a:solidFill>
+              </a:endParaRPr>
+            </a:p>
+            <a:p>
+              <a:pPr indent="-323850" lvl="0" marL="457200" rtl="0" algn="l">
+                <a:lnSpc>
+                  <a:spcPct val="115000"/>
+                </a:lnSpc>
+                <a:spcBef>
+                  <a:spcPts val="0"/>
+                </a:spcBef>
+                <a:spcAft>
+                  <a:spcPts val="0"/>
+                </a:spcAft>
+                <a:buClr>
+                  <a:schemeClr val="dk1"/>
+                </a:buClr>
+                <a:buSzPts val="1500"/>
+                <a:buAutoNum type="arabicPeriod"/>
+              </a:pPr>
+              <a:r>
+                <a:rPr lang="en-US" sz="1500">
+                  <a:solidFill>
+                    <a:schemeClr val="dk1"/>
+                  </a:solidFill>
+                </a:rPr>
+                <a:t>Búsqueda de Seguridad: La policía aeroportuaria emite una alerta buscando al pasajero "Luis Duarte". Recorra la matriz fila por fila y verifique si el nombre del pasajero existe dentro de alguna de las celdas.</a:t>
+              </a:r>
+              <a:endParaRPr sz="1500">
+                <a:solidFill>
+                  <a:schemeClr val="dk1"/>
+                </a:solidFill>
+              </a:endParaRPr>
+            </a:p>
+            <a:p>
+              <a:pPr indent="-323850" lvl="0" marL="457200" rtl="0" algn="l">
+                <a:lnSpc>
+                  <a:spcPct val="115000"/>
+                </a:lnSpc>
+                <a:spcBef>
+                  <a:spcPts val="0"/>
+                </a:spcBef>
+                <a:spcAft>
+                  <a:spcPts val="0"/>
+                </a:spcAft>
+                <a:buClr>
+                  <a:schemeClr val="dk1"/>
+                </a:buClr>
+                <a:buSzPts val="1500"/>
+                <a:buAutoNum type="arabicPeriod"/>
+              </a:pPr>
+              <a:r>
+                <a:rPr lang="en-US" sz="1500">
+                  <a:solidFill>
+                    <a:schemeClr val="dk1"/>
+                  </a:solidFill>
+                </a:rPr>
+                <a:t>Si el sistema encuentra al pasajero, debe desplegar un mensaje en pantalla indicando en qué número de fila se localiza su equipaje y cuál es el estado actual de su filtro. Si no existe, debe mostrar un mensaje de "Pasajero limpio".</a:t>
+              </a:r>
+              <a:endParaRPr sz="1500">
+                <a:solidFill>
+                  <a:schemeClr val="dk1"/>
+                </a:solidFill>
+              </a:endParaRPr>
+            </a:p>
+            <a:p>
+              <a:pPr indent="0" lvl="0" marL="457200" rtl="0" algn="l">
+                <a:lnSpc>
+                  <a:spcPct val="115000"/>
+                </a:lnSpc>
+                <a:spcBef>
+                  <a:spcPts val="1200"/>
+                </a:spcBef>
+                <a:spcAft>
+                  <a:spcPts val="0"/>
+                </a:spcAft>
+                <a:buNone/>
+              </a:pPr>
+              <a:r>
+                <a:t/>
+              </a:r>
+              <a:endParaRPr b="1" sz="1000">
+                <a:solidFill>
+                  <a:schemeClr val="dk1"/>
+                </a:solidFill>
+              </a:endParaRPr>
+            </a:p>
+            <a:p>
+              <a:pPr indent="0" lvl="0" marL="0" rtl="0" algn="l">
+                <a:spcBef>
+                  <a:spcPts val="1200"/>
+                </a:spcBef>
+                <a:spcAft>
+                  <a:spcPts val="900"/>
+                </a:spcAft>
+                <a:buNone/>
+              </a:pPr>
+              <a:r>
+                <a:t/>
+              </a:r>
+              <a:endParaRPr b="1" sz="1800">
+                <a:solidFill>
+                  <a:srgbClr val="121212"/>
+                </a:solidFill>
+                <a:latin typeface="Arial"/>
+                <a:ea typeface="Arial"/>
+                <a:cs typeface="Arial"/>
+                <a:sym typeface="Arial"/>
+              </a:endParaRPr>
+            </a:p>
+          </p:txBody>
+        </p:sp>
+        <p:sp>
+          <p:nvSpPr>
+            <p:cNvPr id="498" name="Google Shape;498;p35"/>
+            <p:cNvSpPr/>
+            <p:nvPr/>
+          </p:nvSpPr>
+          <p:spPr>
+            <a:xfrm>
+              <a:off x="4476750" y="5609989"/>
+              <a:ext cx="7048500" cy="486000"/>
+            </a:xfrm>
+            <a:prstGeom prst="roundRect">
+              <a:avLst>
+                <a:gd fmla="val 6250" name="adj"/>
+              </a:avLst>
+            </a:prstGeom>
+            <a:solidFill>
+              <a:srgbClr val="E8F0FE"/>
+            </a:solidFill>
+            <a:ln>
+              <a:noFill/>
+            </a:ln>
+          </p:spPr>
+          <p:txBody>
+            <a:bodyPr anchorCtr="0" anchor="ctr" bIns="0" lIns="0" spcFirstLastPara="1" rIns="0" wrap="square" tIns="0">
+              <a:noAutofit/>
+            </a:bodyPr>
+            <a:lstStyle/>
+            <a:p>
+              <a:pPr indent="0" lvl="0" marL="0" rtl="0" algn="l">
+                <a:spcBef>
+                  <a:spcPts val="0"/>
+                </a:spcBef>
+                <a:spcAft>
+                  <a:spcPts val="0"/>
+                </a:spcAft>
+                <a:buNone/>
+              </a:pPr>
+              <a:r>
+                <a:t/>
+              </a:r>
+              <a:endParaRPr/>
+            </a:p>
+          </p:txBody>
+        </p:sp>
+        <p:sp>
+          <p:nvSpPr>
+            <p:cNvPr id="499" name="Google Shape;499;p35"/>
+            <p:cNvSpPr txBox="1"/>
+            <p:nvPr/>
+          </p:nvSpPr>
+          <p:spPr>
+            <a:xfrm>
+              <a:off x="4572000" y="5577877"/>
+              <a:ext cx="6858000" cy="486000"/>
+            </a:xfrm>
+            <a:prstGeom prst="rect">
+              <a:avLst/>
+            </a:prstGeom>
+            <a:noFill/>
+            <a:ln>
+              <a:noFill/>
+            </a:ln>
+          </p:spPr>
+          <p:txBody>
+            <a:bodyPr anchorCtr="0" anchor="ctr" bIns="0" lIns="0" spcFirstLastPara="1" rIns="0" wrap="square" tIns="0">
+              <a:noAutofit/>
+            </a:bodyPr>
+            <a:lstStyle/>
+            <a:p>
+              <a:pPr indent="0" lvl="0" marL="0" rtl="0" algn="l">
+                <a:spcBef>
+                  <a:spcPts val="0"/>
+                </a:spcBef>
+                <a:spcAft>
+                  <a:spcPts val="0"/>
+                </a:spcAft>
+                <a:buClr>
+                  <a:schemeClr val="dk1"/>
+                </a:buClr>
+                <a:buSzPts val="1100"/>
+                <a:buFont typeface="Arial"/>
+                <a:buNone/>
+              </a:pPr>
+              <a:r>
+                <a:rPr b="1" lang="en-US" sz="1100">
+                  <a:solidFill>
+                    <a:srgbClr val="005088"/>
+                  </a:solidFill>
+                  <a:latin typeface="Arial"/>
+                  <a:ea typeface="Arial"/>
+                  <a:cs typeface="Arial"/>
+                  <a:sym typeface="Arial"/>
+                </a:rPr>
+                <a:t>Métodos de Vector a utilizar: </a:t>
+              </a:r>
+              <a:r>
+                <a:rPr lang="en-US" sz="1100">
+                  <a:solidFill>
+                    <a:srgbClr val="188038"/>
+                  </a:solidFill>
+                </a:rPr>
+                <a:t>add(E e)</a:t>
+              </a:r>
+              <a:r>
+                <a:rPr lang="en-US" sz="1100">
+                  <a:solidFill>
+                    <a:schemeClr val="dk1"/>
+                  </a:solidFill>
+                </a:rPr>
+                <a:t>, </a:t>
+              </a:r>
+              <a:r>
+                <a:rPr lang="en-US" sz="1100">
+                  <a:solidFill>
+                    <a:srgbClr val="188038"/>
+                  </a:solidFill>
+                </a:rPr>
+                <a:t>get(int index)</a:t>
+              </a:r>
+              <a:r>
+                <a:rPr lang="en-US" sz="1100">
+                  <a:solidFill>
+                    <a:schemeClr val="dk1"/>
+                  </a:solidFill>
+                </a:rPr>
+                <a:t>, </a:t>
+              </a:r>
+              <a:r>
+                <a:rPr lang="en-US" sz="1100">
+                  <a:solidFill>
+                    <a:srgbClr val="188038"/>
+                  </a:solidFill>
+                </a:rPr>
+                <a:t>contains(Object o)</a:t>
+              </a:r>
+              <a:r>
+                <a:rPr lang="en-US" sz="1100">
+                  <a:solidFill>
+                    <a:schemeClr val="dk1"/>
+                  </a:solidFill>
+                </a:rPr>
+                <a:t>, </a:t>
+              </a:r>
+              <a:r>
+                <a:rPr lang="en-US" sz="1100">
+                  <a:solidFill>
+                    <a:srgbClr val="188038"/>
+                  </a:solidFill>
+                </a:rPr>
+                <a:t>size()</a:t>
+              </a:r>
+              <a:r>
+                <a:rPr lang="en-US" sz="1100">
+                  <a:solidFill>
+                    <a:schemeClr val="dk1"/>
+                  </a:solidFill>
+                </a:rPr>
+                <a:t>. Bucle </a:t>
+              </a:r>
+              <a:r>
+                <a:rPr lang="en-US" sz="1100">
+                  <a:solidFill>
+                    <a:srgbClr val="188038"/>
+                  </a:solidFill>
+                </a:rPr>
+                <a:t>for</a:t>
+              </a:r>
+              <a:r>
+                <a:rPr lang="en-US" sz="1100">
+                  <a:solidFill>
+                    <a:schemeClr val="dk1"/>
+                  </a:solidFill>
+                </a:rPr>
+                <a:t> clásico combinado con condicionales </a:t>
+              </a:r>
+              <a:r>
+                <a:rPr lang="en-US" sz="1100">
+                  <a:solidFill>
+                    <a:srgbClr val="188038"/>
+                  </a:solidFill>
+                </a:rPr>
+                <a:t>if</a:t>
+              </a:r>
+              <a:r>
+                <a:rPr lang="en-US" sz="1100">
+                  <a:solidFill>
+                    <a:schemeClr val="dk1"/>
+                  </a:solidFill>
+                </a:rPr>
+                <a:t>.</a:t>
+              </a:r>
+              <a:endParaRPr b="1" sz="1100">
+                <a:solidFill>
+                  <a:schemeClr val="dk1"/>
+                </a:solidFill>
+              </a:endParaRPr>
+            </a:p>
+          </p:txBody>
+        </p:sp>
+      </p:grpSp>
+    </p:spTree>
+  </p:cSld>
+  <p:clrMapOvr>
+    <a:masterClrMapping/>
+  </p:clrMapOvr>
+</p:sld>
+</file>
+
+<file path=ppt/slides/slide23.xml><?xml version="1.0" encoding="utf-8"?>
+<p:sld xmlns:a="http://schemas.openxmlformats.org/drawingml/2006/main" xmlns:r="http://schemas.openxmlformats.org/officeDocument/2006/relationships" xmlns:mc="http://schemas.openxmlformats.org/markup-compatibility/2006" xmlns:mv="urn:schemas-microsoft-com:mac:vml" xmlns:p="http://schemas.openxmlformats.org/presentationml/2006/main" xmlns:c="http://schemas.openxmlformats.org/drawingml/2006/chart" xmlns:dgm="http://schemas.openxmlformats.org/drawingml/2006/diagram" xmlns:o="urn:schemas-microsoft-com:office:office" xmlns:v="urn:schemas-microsoft-com:vml" xmlns:pvml="urn:schemas-microsoft-com:office:powerpoint" xmlns:com="http://schemas.openxmlformats.org/drawingml/2006/compatibility" xmlns:p14="http://schemas.microsoft.com/office/powerpoint/2010/main" xmlns:p15="http://schemas.microsoft.com/office/powerpoint/2012/main" xmlns:ahyp="http://schemas.microsoft.com/office/drawing/2018/hyperlinkcolor">
+  <p:cSld>
+    <p:bg>
+      <p:bgPr>
+        <a:blipFill>
+          <a:blip r:embed="rId3">
+            <a:alphaModFix/>
+          </a:blip>
+          <a:stretch>
+            <a:fillRect/>
+          </a:stretch>
+        </a:blipFill>
+      </p:bgPr>
+    </p:bg>
+    <p:spTree>
+      <p:nvGrpSpPr>
+        <p:cNvPr id="503" name="Shape 503"/>
+        <p:cNvGrpSpPr/>
+        <p:nvPr/>
+      </p:nvGrpSpPr>
+      <p:grpSpPr>
+        <a:xfrm>
+          <a:off x="0" y="0"/>
+          <a:ext cx="0" cy="0"/>
+          <a:chOff x="0" y="0"/>
+          <a:chExt cx="0" cy="0"/>
+        </a:xfrm>
+      </p:grpSpPr>
+      <p:pic>
+        <p:nvPicPr>
+          <p:cNvPr id="504" name="Google Shape;504;p36"/>
+          <p:cNvPicPr preferRelativeResize="0"/>
+          <p:nvPr/>
+        </p:nvPicPr>
+        <p:blipFill rotWithShape="1">
+          <a:blip r:embed="rId4">
+            <a:alphaModFix/>
+          </a:blip>
+          <a:srcRect b="0" l="0" r="0" t="0"/>
+          <a:stretch/>
+        </p:blipFill>
+        <p:spPr>
+          <a:xfrm>
+            <a:off x="0" y="0"/>
+            <a:ext cx="12192000" cy="6858000"/>
+          </a:xfrm>
+          <a:prstGeom prst="rect">
+            <a:avLst/>
+          </a:prstGeom>
+          <a:noFill/>
+          <a:ln>
+            <a:noFill/>
+          </a:ln>
+        </p:spPr>
+      </p:pic>
+      <p:sp>
+        <p:nvSpPr>
+          <p:cNvPr id="505" name="Google Shape;505;p36"/>
+          <p:cNvSpPr/>
+          <p:nvPr/>
+        </p:nvSpPr>
+        <p:spPr>
+          <a:xfrm>
+            <a:off x="0" y="0"/>
+            <a:ext cx="12192000" cy="952500"/>
+          </a:xfrm>
+          <a:prstGeom prst="rect">
+            <a:avLst/>
+          </a:prstGeom>
+          <a:solidFill>
+            <a:srgbClr val="FFFFFF">
+              <a:alpha val="60000"/>
+            </a:srgbClr>
+          </a:solidFill>
+          <a:ln>
+            <a:noFill/>
+          </a:ln>
+        </p:spPr>
+        <p:txBody>
+          <a:bodyPr anchorCtr="0" anchor="ctr" bIns="0" lIns="0" spcFirstLastPara="1" rIns="0" wrap="square" tIns="0">
+            <a:noAutofit/>
+          </a:bodyPr>
+          <a:lstStyle/>
+          <a:p>
+            <a:pPr indent="0" lvl="0" marL="0" rtl="0" algn="l">
+              <a:spcBef>
+                <a:spcPts val="0"/>
+              </a:spcBef>
+              <a:spcAft>
+                <a:spcPts val="0"/>
+              </a:spcAft>
+              <a:buNone/>
+            </a:pPr>
+            <a:r>
+              <a:t/>
+            </a:r>
+            <a:endParaRPr/>
+          </a:p>
+        </p:txBody>
+      </p:sp>
+      <p:sp>
+        <p:nvSpPr>
+          <p:cNvPr id="506" name="Google Shape;506;p36"/>
+          <p:cNvSpPr txBox="1"/>
+          <p:nvPr/>
+        </p:nvSpPr>
+        <p:spPr>
+          <a:xfrm>
+            <a:off x="476250" y="67575"/>
+            <a:ext cx="11239500" cy="1074300"/>
+          </a:xfrm>
+          <a:prstGeom prst="rect">
+            <a:avLst/>
+          </a:prstGeom>
+          <a:noFill/>
+          <a:ln>
+            <a:noFill/>
+          </a:ln>
+        </p:spPr>
+        <p:txBody>
+          <a:bodyPr anchorCtr="0" anchor="ctr" bIns="0" lIns="0" spcFirstLastPara="1" rIns="0" wrap="square" tIns="0">
+            <a:noAutofit/>
+          </a:bodyPr>
+          <a:lstStyle/>
+          <a:p>
+            <a:pPr indent="0" lvl="0" marL="0" rtl="0" algn="l">
+              <a:spcBef>
+                <a:spcPts val="0"/>
+              </a:spcBef>
+              <a:spcAft>
+                <a:spcPts val="0"/>
+              </a:spcAft>
+              <a:buNone/>
+            </a:pPr>
+            <a:r>
+              <a:rPr b="1" lang="en-US" sz="3200">
+                <a:solidFill>
+                  <a:srgbClr val="005088"/>
+                </a:solidFill>
+                <a:latin typeface="Merriweather"/>
+                <a:ea typeface="Merriweather"/>
+                <a:cs typeface="Merriweather"/>
+                <a:sym typeface="Merriweather"/>
+              </a:rPr>
+              <a:t>Ejemplo 3: </a:t>
+            </a:r>
+            <a:r>
+              <a:rPr b="1" lang="en-US" sz="3200">
+                <a:solidFill>
+                  <a:srgbClr val="005088"/>
+                </a:solidFill>
+                <a:latin typeface="Merriweather"/>
+                <a:ea typeface="Merriweather"/>
+                <a:cs typeface="Merriweather"/>
+                <a:sym typeface="Merriweather"/>
+              </a:rPr>
+              <a:t>Registro de Calificaciones</a:t>
+            </a:r>
+            <a:endParaRPr b="1" sz="3200">
+              <a:solidFill>
+                <a:srgbClr val="005088"/>
+              </a:solidFill>
+              <a:latin typeface="Merriweather"/>
+              <a:ea typeface="Merriweather"/>
+              <a:cs typeface="Merriweather"/>
+              <a:sym typeface="Merriweather"/>
+            </a:endParaRPr>
+          </a:p>
+        </p:txBody>
+      </p:sp>
+      <p:sp>
+        <p:nvSpPr>
+          <p:cNvPr id="507" name="Google Shape;507;p36"/>
+          <p:cNvSpPr/>
+          <p:nvPr/>
+        </p:nvSpPr>
+        <p:spPr>
+          <a:xfrm>
+            <a:off x="476250" y="1333500"/>
+            <a:ext cx="3619500" cy="4953000"/>
+          </a:xfrm>
+          <a:prstGeom prst="roundRect">
+            <a:avLst>
+              <a:gd fmla="val 2631" name="adj"/>
+            </a:avLst>
+          </a:prstGeom>
+          <a:solidFill>
+            <a:srgbClr val="FFFFFF"/>
+          </a:solidFill>
+          <a:ln cap="flat" cmpd="sng" w="19050">
+            <a:solidFill>
+              <a:srgbClr val="005088"/>
+            </a:solidFill>
+            <a:prstDash val="solid"/>
+            <a:round/>
+            <a:headEnd len="sm" w="sm" type="none"/>
+            <a:tailEnd len="sm" w="sm" type="none"/>
+          </a:ln>
+        </p:spPr>
+        <p:txBody>
+          <a:bodyPr anchorCtr="0" anchor="ctr" bIns="0" lIns="0" spcFirstLastPara="1" rIns="0" wrap="square" tIns="0">
+            <a:noAutofit/>
+          </a:bodyPr>
+          <a:lstStyle/>
+          <a:p>
+            <a:pPr indent="0" lvl="0" marL="0" rtl="0" algn="l">
+              <a:spcBef>
+                <a:spcPts val="0"/>
+              </a:spcBef>
+              <a:spcAft>
+                <a:spcPts val="0"/>
+              </a:spcAft>
+              <a:buNone/>
+            </a:pPr>
+            <a:r>
+              <a:t/>
+            </a:r>
+            <a:endParaRPr/>
+          </a:p>
+        </p:txBody>
+      </p:sp>
+      <p:grpSp>
+        <p:nvGrpSpPr>
+          <p:cNvPr id="508" name="Google Shape;508;p36"/>
+          <p:cNvGrpSpPr/>
+          <p:nvPr/>
+        </p:nvGrpSpPr>
+        <p:grpSpPr>
+          <a:xfrm>
+            <a:off x="666750" y="1524000"/>
+            <a:ext cx="3238500" cy="4572150"/>
+            <a:chOff x="666750" y="1524000"/>
+            <a:chExt cx="3238500" cy="4572150"/>
+          </a:xfrm>
+        </p:grpSpPr>
+        <p:sp>
+          <p:nvSpPr>
+            <p:cNvPr id="509" name="Google Shape;509;p36"/>
+            <p:cNvSpPr txBox="1"/>
+            <p:nvPr/>
+          </p:nvSpPr>
+          <p:spPr>
+            <a:xfrm>
+              <a:off x="666750" y="1524000"/>
+              <a:ext cx="3238500" cy="381000"/>
+            </a:xfrm>
+            <a:prstGeom prst="rect">
+              <a:avLst/>
+            </a:prstGeom>
+            <a:noFill/>
+            <a:ln>
+              <a:noFill/>
+            </a:ln>
+          </p:spPr>
+          <p:txBody>
+            <a:bodyPr anchorCtr="0" anchor="ctr" bIns="0" lIns="0" spcFirstLastPara="1" rIns="0" wrap="square" tIns="0">
+              <a:noAutofit/>
+            </a:bodyPr>
+            <a:lstStyle/>
+            <a:p>
+              <a:pPr indent="0" lvl="0" marL="0" rtl="0" algn="l">
+                <a:spcBef>
+                  <a:spcPts val="0"/>
+                </a:spcBef>
+                <a:spcAft>
+                  <a:spcPts val="0"/>
+                </a:spcAft>
+                <a:buNone/>
+              </a:pPr>
+              <a:r>
+                <a:rPr b="1" lang="en-US" sz="1800">
+                  <a:solidFill>
+                    <a:srgbClr val="005088"/>
+                  </a:solidFill>
+                  <a:latin typeface="Merriweather"/>
+                  <a:ea typeface="Merriweather"/>
+                  <a:cs typeface="Merriweather"/>
+                  <a:sym typeface="Merriweather"/>
+                </a:rPr>
+                <a:t>Contexto</a:t>
+              </a:r>
+              <a:endParaRPr b="1" sz="1800">
+                <a:solidFill>
+                  <a:srgbClr val="005088"/>
+                </a:solidFill>
+                <a:latin typeface="Merriweather"/>
+                <a:ea typeface="Merriweather"/>
+                <a:cs typeface="Merriweather"/>
+                <a:sym typeface="Merriweather"/>
+              </a:endParaRPr>
+            </a:p>
+          </p:txBody>
+        </p:sp>
+        <p:sp>
+          <p:nvSpPr>
+            <p:cNvPr id="510" name="Google Shape;510;p36"/>
+            <p:cNvSpPr txBox="1"/>
+            <p:nvPr/>
+          </p:nvSpPr>
+          <p:spPr>
+            <a:xfrm>
+              <a:off x="666750" y="2000250"/>
+              <a:ext cx="3238500" cy="4095900"/>
+            </a:xfrm>
+            <a:prstGeom prst="rect">
+              <a:avLst/>
+            </a:prstGeom>
+            <a:noFill/>
+            <a:ln>
+              <a:noFill/>
+            </a:ln>
+          </p:spPr>
+          <p:txBody>
+            <a:bodyPr anchorCtr="0" anchor="t" bIns="0" lIns="0" spcFirstLastPara="1" rIns="0" wrap="square" tIns="0">
+              <a:noAutofit/>
+            </a:bodyPr>
+            <a:lstStyle/>
+            <a:p>
+              <a:pPr indent="0" lvl="0" marL="0" rtl="0" algn="l">
+                <a:lnSpc>
+                  <a:spcPct val="115000"/>
+                </a:lnSpc>
+                <a:spcBef>
+                  <a:spcPts val="1200"/>
+                </a:spcBef>
+                <a:spcAft>
+                  <a:spcPts val="0"/>
+                </a:spcAft>
+                <a:buNone/>
+              </a:pPr>
+              <a:r>
+                <a:rPr lang="en-US" sz="1700">
+                  <a:solidFill>
+                    <a:schemeClr val="dk1"/>
+                  </a:solidFill>
+                </a:rPr>
+                <a:t>Se ha solicitado un módulo para el procesamiento de </a:t>
+              </a:r>
+              <a:r>
+                <a:rPr lang="en-US" sz="1700">
+                  <a:solidFill>
+                    <a:schemeClr val="dk1"/>
+                  </a:solidFill>
+                </a:rPr>
+                <a:t>notas</a:t>
+              </a:r>
+              <a:r>
+                <a:rPr lang="en-US" sz="1700">
+                  <a:solidFill>
+                    <a:schemeClr val="dk1"/>
+                  </a:solidFill>
+                </a:rPr>
+                <a:t> finales. El dilema del sistema actual es que los profesores ingresan notas con decimales, pero el sistema central solo acepta números enteros perfectamente redondeados para evitar reclamos</a:t>
+              </a:r>
+              <a:endParaRPr sz="1700">
+                <a:solidFill>
+                  <a:schemeClr val="dk1"/>
+                </a:solidFill>
+              </a:endParaRPr>
+            </a:p>
+            <a:p>
+              <a:pPr indent="0" lvl="0" marL="0" rtl="0" algn="l">
+                <a:lnSpc>
+                  <a:spcPct val="115000"/>
+                </a:lnSpc>
+                <a:spcBef>
+                  <a:spcPts val="1200"/>
+                </a:spcBef>
+                <a:spcAft>
+                  <a:spcPts val="1200"/>
+                </a:spcAft>
+                <a:buNone/>
+              </a:pPr>
+              <a:r>
+                <a:t/>
+              </a:r>
+              <a:endParaRPr sz="1900">
+                <a:solidFill>
+                  <a:schemeClr val="dk1"/>
+                </a:solidFill>
+              </a:endParaRPr>
+            </a:p>
+          </p:txBody>
+        </p:sp>
+      </p:grpSp>
+      <p:sp>
+        <p:nvSpPr>
+          <p:cNvPr id="511" name="Google Shape;511;p36"/>
+          <p:cNvSpPr/>
+          <p:nvPr/>
+        </p:nvSpPr>
+        <p:spPr>
+          <a:xfrm>
+            <a:off x="4286250" y="1333500"/>
+            <a:ext cx="7429500" cy="4953000"/>
+          </a:xfrm>
+          <a:prstGeom prst="roundRect">
+            <a:avLst>
+              <a:gd fmla="val 1923" name="adj"/>
+            </a:avLst>
+          </a:prstGeom>
+          <a:solidFill>
+            <a:srgbClr val="FFFFFF">
+              <a:alpha val="90000"/>
+            </a:srgbClr>
+          </a:solidFill>
+          <a:ln cap="flat" cmpd="sng" w="9525">
+            <a:solidFill>
+              <a:srgbClr val="005088"/>
+            </a:solidFill>
+            <a:prstDash val="solid"/>
+            <a:round/>
+            <a:headEnd len="sm" w="sm" type="none"/>
+            <a:tailEnd len="sm" w="sm" type="none"/>
+          </a:ln>
+        </p:spPr>
+        <p:txBody>
+          <a:bodyPr anchorCtr="0" anchor="ctr" bIns="0" lIns="0" spcFirstLastPara="1" rIns="0" wrap="square" tIns="0">
+            <a:noAutofit/>
+          </a:bodyPr>
+          <a:lstStyle/>
+          <a:p>
+            <a:pPr indent="0" lvl="0" marL="0" rtl="0" algn="l">
+              <a:spcBef>
+                <a:spcPts val="0"/>
+              </a:spcBef>
+              <a:spcAft>
+                <a:spcPts val="0"/>
+              </a:spcAft>
+              <a:buNone/>
+            </a:pPr>
+            <a:r>
+              <a:t/>
+            </a:r>
+            <a:endParaRPr/>
+          </a:p>
+        </p:txBody>
+      </p:sp>
+      <p:grpSp>
+        <p:nvGrpSpPr>
+          <p:cNvPr id="512" name="Google Shape;512;p36"/>
+          <p:cNvGrpSpPr/>
+          <p:nvPr/>
+        </p:nvGrpSpPr>
+        <p:grpSpPr>
+          <a:xfrm>
+            <a:off x="4476750" y="1428751"/>
+            <a:ext cx="7048500" cy="4762641"/>
+            <a:chOff x="4476750" y="1524000"/>
+            <a:chExt cx="7048500" cy="4571989"/>
+          </a:xfrm>
+        </p:grpSpPr>
+        <p:sp>
+          <p:nvSpPr>
+            <p:cNvPr id="513" name="Google Shape;513;p36"/>
+            <p:cNvSpPr txBox="1"/>
+            <p:nvPr/>
+          </p:nvSpPr>
+          <p:spPr>
+            <a:xfrm>
+              <a:off x="4476750" y="1524000"/>
+              <a:ext cx="7048500" cy="381000"/>
+            </a:xfrm>
+            <a:prstGeom prst="rect">
+              <a:avLst/>
+            </a:prstGeom>
+            <a:noFill/>
+            <a:ln>
+              <a:noFill/>
+            </a:ln>
+          </p:spPr>
+          <p:txBody>
+            <a:bodyPr anchorCtr="0" anchor="ctr" bIns="0" lIns="0" spcFirstLastPara="1" rIns="0" wrap="square" tIns="0">
+              <a:noAutofit/>
+            </a:bodyPr>
+            <a:lstStyle/>
+            <a:p>
+              <a:pPr indent="0" lvl="0" marL="0" rtl="0" algn="l">
+                <a:spcBef>
+                  <a:spcPts val="0"/>
+                </a:spcBef>
+                <a:spcAft>
+                  <a:spcPts val="0"/>
+                </a:spcAft>
+                <a:buNone/>
+              </a:pPr>
+              <a:r>
+                <a:rPr b="1" lang="en-US" sz="1800">
+                  <a:solidFill>
+                    <a:srgbClr val="005088"/>
+                  </a:solidFill>
+                  <a:latin typeface="Merriweather"/>
+                  <a:ea typeface="Merriweather"/>
+                  <a:cs typeface="Merriweather"/>
+                  <a:sym typeface="Merriweather"/>
+                </a:rPr>
+                <a:t>Planteamiento y Lógica</a:t>
+              </a:r>
+              <a:endParaRPr b="1" sz="1800">
+                <a:solidFill>
+                  <a:srgbClr val="005088"/>
+                </a:solidFill>
+                <a:latin typeface="Merriweather"/>
+                <a:ea typeface="Merriweather"/>
+                <a:cs typeface="Merriweather"/>
+                <a:sym typeface="Merriweather"/>
+              </a:endParaRPr>
+            </a:p>
+          </p:txBody>
+        </p:sp>
+        <p:sp>
+          <p:nvSpPr>
+            <p:cNvPr id="514" name="Google Shape;514;p36"/>
+            <p:cNvSpPr txBox="1"/>
+            <p:nvPr/>
+          </p:nvSpPr>
+          <p:spPr>
+            <a:xfrm>
+              <a:off x="4476750" y="2000240"/>
+              <a:ext cx="7048500" cy="3482400"/>
+            </a:xfrm>
+            <a:prstGeom prst="rect">
+              <a:avLst/>
+            </a:prstGeom>
+            <a:noFill/>
+            <a:ln>
+              <a:noFill/>
+            </a:ln>
+          </p:spPr>
+          <p:txBody>
+            <a:bodyPr anchorCtr="0" anchor="t" bIns="0" lIns="0" spcFirstLastPara="1" rIns="0" wrap="square" tIns="0">
+              <a:noAutofit/>
+            </a:bodyPr>
+            <a:lstStyle/>
+            <a:p>
+              <a:pPr indent="-317500" lvl="0" marL="457200" rtl="0" algn="l">
+                <a:lnSpc>
+                  <a:spcPct val="115000"/>
+                </a:lnSpc>
+                <a:spcBef>
+                  <a:spcPts val="0"/>
+                </a:spcBef>
+                <a:spcAft>
+                  <a:spcPts val="0"/>
+                </a:spcAft>
+                <a:buClr>
+                  <a:schemeClr val="dk1"/>
+                </a:buClr>
+                <a:buSzPts val="1400"/>
+                <a:buAutoNum type="arabicPeriod"/>
+              </a:pPr>
+              <a:r>
+                <a:rPr b="1" lang="en-US">
+                  <a:solidFill>
+                    <a:schemeClr val="dk1"/>
+                  </a:solidFill>
+                </a:rPr>
+                <a:t>Estructura Académica:</a:t>
+              </a:r>
+              <a:r>
+                <a:rPr lang="en-US">
+                  <a:solidFill>
+                    <a:schemeClr val="dk1"/>
+                  </a:solidFill>
+                </a:rPr>
+                <a:t> Crea un cuadro de calificaciones utilizando una matriz dinámica donde cada fila almacene: </a:t>
+              </a:r>
+              <a:r>
+                <a:rPr lang="en-US">
+                  <a:solidFill>
+                    <a:srgbClr val="188038"/>
+                  </a:solidFill>
+                </a:rPr>
+                <a:t>[Nombre del Estudiante, Nota Acumulada (double), Nota Examen (double)]</a:t>
+              </a:r>
+              <a:r>
+                <a:rPr lang="en-US">
+                  <a:solidFill>
+                    <a:schemeClr val="dk1"/>
+                  </a:solidFill>
+                </a:rPr>
+                <a:t>.</a:t>
+              </a:r>
+              <a:endParaRPr>
+                <a:solidFill>
+                  <a:schemeClr val="dk1"/>
+                </a:solidFill>
+              </a:endParaRPr>
+            </a:p>
+            <a:p>
+              <a:pPr indent="-317500" lvl="0" marL="457200" rtl="0" algn="l">
+                <a:lnSpc>
+                  <a:spcPct val="115000"/>
+                </a:lnSpc>
+                <a:spcBef>
+                  <a:spcPts val="0"/>
+                </a:spcBef>
+                <a:spcAft>
+                  <a:spcPts val="0"/>
+                </a:spcAft>
+                <a:buClr>
+                  <a:schemeClr val="dk1"/>
+                </a:buClr>
+                <a:buSzPts val="1400"/>
+                <a:buAutoNum type="arabicPeriod"/>
+              </a:pPr>
+              <a:r>
+                <a:rPr b="1" lang="en-US">
+                  <a:solidFill>
+                    <a:schemeClr val="dk1"/>
+                  </a:solidFill>
+                </a:rPr>
+                <a:t>Carga de Datos:</a:t>
+              </a:r>
+              <a:r>
+                <a:rPr lang="en-US">
+                  <a:solidFill>
+                    <a:schemeClr val="dk1"/>
+                  </a:solidFill>
+                </a:rPr>
+                <a:t> Registra las calificaciones de dos estudiantes: </a:t>
+              </a:r>
+              <a:r>
+                <a:rPr lang="en-US">
+                  <a:solidFill>
+                    <a:srgbClr val="188038"/>
+                  </a:solidFill>
+                </a:rPr>
+                <a:t>["Ana Ortiz", 55.4, 25.3]</a:t>
+              </a:r>
+              <a:r>
+                <a:rPr lang="en-US">
+                  <a:solidFill>
+                    <a:schemeClr val="dk1"/>
+                  </a:solidFill>
+                </a:rPr>
+                <a:t> y </a:t>
+              </a:r>
+              <a:r>
+                <a:rPr lang="en-US">
+                  <a:solidFill>
+                    <a:srgbClr val="188038"/>
+                  </a:solidFill>
+                </a:rPr>
+                <a:t>["Pedro Gómez", 40.2, 24.5]</a:t>
+              </a:r>
+              <a:r>
+                <a:rPr lang="en-US">
+                  <a:solidFill>
+                    <a:schemeClr val="dk1"/>
+                  </a:solidFill>
+                </a:rPr>
+                <a:t>.</a:t>
+              </a:r>
+              <a:endParaRPr>
+                <a:solidFill>
+                  <a:schemeClr val="dk1"/>
+                </a:solidFill>
+              </a:endParaRPr>
+            </a:p>
+            <a:p>
+              <a:pPr indent="-317500" lvl="0" marL="457200" rtl="0" algn="l">
+                <a:lnSpc>
+                  <a:spcPct val="115000"/>
+                </a:lnSpc>
+                <a:spcBef>
+                  <a:spcPts val="0"/>
+                </a:spcBef>
+                <a:spcAft>
+                  <a:spcPts val="0"/>
+                </a:spcAft>
+                <a:buClr>
+                  <a:schemeClr val="dk1"/>
+                </a:buClr>
+                <a:buSzPts val="1400"/>
+                <a:buAutoNum type="arabicPeriod"/>
+              </a:pPr>
+              <a:r>
+                <a:rPr b="1" lang="en-US">
+                  <a:solidFill>
+                    <a:schemeClr val="dk1"/>
+                  </a:solidFill>
+                </a:rPr>
+                <a:t>Cálculo de Promedios:</a:t>
+              </a:r>
+              <a:r>
+                <a:rPr lang="en-US">
+                  <a:solidFill>
+                    <a:schemeClr val="dk1"/>
+                  </a:solidFill>
+                </a:rPr>
+                <a:t> Diseña un bucle que visite cada fila de la matriz. Por cada estudiante, debes extraer la nota acumulada y la nota del examen, sumarlas para obtener la nota final con decimales, y luego aplicar un </a:t>
+              </a:r>
+              <a:r>
+                <a:rPr b="1" lang="en-US">
+                  <a:solidFill>
+                    <a:schemeClr val="dk1"/>
+                  </a:solidFill>
+                </a:rPr>
+                <a:t>redondeo matemático estricto al entero más cercano</a:t>
+              </a:r>
+              <a:r>
+                <a:rPr lang="en-US">
+                  <a:solidFill>
+                    <a:schemeClr val="dk1"/>
+                  </a:solidFill>
+                </a:rPr>
+                <a:t> (por ejemplo: si la suma da 80.7 debe pasar a 81; si da 64.3 debe bajar a 64).</a:t>
+              </a:r>
+              <a:endParaRPr>
+                <a:solidFill>
+                  <a:schemeClr val="dk1"/>
+                </a:solidFill>
+              </a:endParaRPr>
+            </a:p>
+            <a:p>
+              <a:pPr indent="-317500" lvl="0" marL="457200" rtl="0" algn="l">
+                <a:lnSpc>
+                  <a:spcPct val="115000"/>
+                </a:lnSpc>
+                <a:spcBef>
+                  <a:spcPts val="0"/>
+                </a:spcBef>
+                <a:spcAft>
+                  <a:spcPts val="0"/>
+                </a:spcAft>
+                <a:buClr>
+                  <a:schemeClr val="dk1"/>
+                </a:buClr>
+                <a:buSzPts val="1400"/>
+                <a:buAutoNum type="arabicPeriod"/>
+              </a:pPr>
+              <a:r>
+                <a:rPr b="1" lang="en-US">
+                  <a:solidFill>
+                    <a:schemeClr val="dk1"/>
+                  </a:solidFill>
+                </a:rPr>
+                <a:t>Actualización de la Matriz:</a:t>
+              </a:r>
+              <a:r>
+                <a:rPr lang="en-US">
+                  <a:solidFill>
+                    <a:schemeClr val="dk1"/>
+                  </a:solidFill>
+                </a:rPr>
+                <a:t> Reemplaza los decimales originales guardando la nueva nota final redondeada dentro de la misma matriz </a:t>
+              </a:r>
+              <a:endParaRPr>
+                <a:solidFill>
+                  <a:schemeClr val="dk1"/>
+                </a:solidFill>
+              </a:endParaRPr>
+            </a:p>
+            <a:p>
+              <a:pPr indent="-317500" lvl="0" marL="457200" rtl="0" algn="l">
+                <a:lnSpc>
+                  <a:spcPct val="115000"/>
+                </a:lnSpc>
+                <a:spcBef>
+                  <a:spcPts val="0"/>
+                </a:spcBef>
+                <a:spcAft>
+                  <a:spcPts val="0"/>
+                </a:spcAft>
+                <a:buClr>
+                  <a:schemeClr val="dk1"/>
+                </a:buClr>
+                <a:buSzPts val="1400"/>
+                <a:buAutoNum type="arabicPeriod"/>
+              </a:pPr>
+              <a:r>
+                <a:rPr b="1" lang="en-US">
+                  <a:solidFill>
+                    <a:schemeClr val="dk1"/>
+                  </a:solidFill>
+                </a:rPr>
+                <a:t>Salida:</a:t>
+              </a:r>
+              <a:r>
+                <a:rPr lang="en-US">
+                  <a:solidFill>
+                    <a:schemeClr val="dk1"/>
+                  </a:solidFill>
+                </a:rPr>
+                <a:t> Imprime el listado final de alumnos con su nota entera definitiva y el promedio de toda la clase</a:t>
+              </a:r>
+              <a:endParaRPr b="1" sz="1900">
+                <a:solidFill>
+                  <a:schemeClr val="dk1"/>
+                </a:solidFill>
+              </a:endParaRPr>
+            </a:p>
+            <a:p>
+              <a:pPr indent="0" lvl="0" marL="457200" rtl="0" algn="l">
+                <a:lnSpc>
+                  <a:spcPct val="115000"/>
+                </a:lnSpc>
+                <a:spcBef>
+                  <a:spcPts val="1200"/>
+                </a:spcBef>
+                <a:spcAft>
+                  <a:spcPts val="0"/>
+                </a:spcAft>
+                <a:buNone/>
+              </a:pPr>
+              <a:r>
+                <a:t/>
+              </a:r>
+              <a:endParaRPr b="1" sz="1100">
+                <a:solidFill>
+                  <a:schemeClr val="dk1"/>
+                </a:solidFill>
+              </a:endParaRPr>
+            </a:p>
+            <a:p>
+              <a:pPr indent="0" lvl="0" marL="0" rtl="0" algn="l">
+                <a:spcBef>
+                  <a:spcPts val="1200"/>
+                </a:spcBef>
+                <a:spcAft>
+                  <a:spcPts val="900"/>
+                </a:spcAft>
+                <a:buNone/>
+              </a:pPr>
+              <a:r>
+                <a:t/>
+              </a:r>
+              <a:endParaRPr b="1" sz="1900">
+                <a:solidFill>
+                  <a:srgbClr val="121212"/>
+                </a:solidFill>
+                <a:latin typeface="Arial"/>
+                <a:ea typeface="Arial"/>
+                <a:cs typeface="Arial"/>
+                <a:sym typeface="Arial"/>
+              </a:endParaRPr>
+            </a:p>
+          </p:txBody>
+        </p:sp>
+        <p:sp>
+          <p:nvSpPr>
+            <p:cNvPr id="515" name="Google Shape;515;p36"/>
+            <p:cNvSpPr/>
+            <p:nvPr/>
+          </p:nvSpPr>
+          <p:spPr>
+            <a:xfrm>
+              <a:off x="4476750" y="5609989"/>
+              <a:ext cx="7048500" cy="486000"/>
+            </a:xfrm>
+            <a:prstGeom prst="roundRect">
+              <a:avLst>
+                <a:gd fmla="val 6250" name="adj"/>
+              </a:avLst>
+            </a:prstGeom>
+            <a:solidFill>
+              <a:srgbClr val="E8F0FE"/>
+            </a:solidFill>
+            <a:ln>
+              <a:noFill/>
+            </a:ln>
+          </p:spPr>
+          <p:txBody>
+            <a:bodyPr anchorCtr="0" anchor="ctr" bIns="0" lIns="0" spcFirstLastPara="1" rIns="0" wrap="square" tIns="0">
+              <a:noAutofit/>
+            </a:bodyPr>
+            <a:lstStyle/>
+            <a:p>
+              <a:pPr indent="0" lvl="0" marL="0" rtl="0" algn="l">
+                <a:spcBef>
+                  <a:spcPts val="0"/>
+                </a:spcBef>
+                <a:spcAft>
+                  <a:spcPts val="0"/>
+                </a:spcAft>
+                <a:buNone/>
+              </a:pPr>
+              <a:r>
+                <a:t/>
+              </a:r>
+              <a:endParaRPr/>
+            </a:p>
+          </p:txBody>
+        </p:sp>
+        <p:sp>
+          <p:nvSpPr>
+            <p:cNvPr id="516" name="Google Shape;516;p36"/>
+            <p:cNvSpPr txBox="1"/>
+            <p:nvPr/>
+          </p:nvSpPr>
+          <p:spPr>
+            <a:xfrm>
+              <a:off x="4572000" y="5577877"/>
+              <a:ext cx="6858000" cy="486000"/>
+            </a:xfrm>
+            <a:prstGeom prst="rect">
+              <a:avLst/>
+            </a:prstGeom>
+            <a:noFill/>
+            <a:ln>
+              <a:noFill/>
+            </a:ln>
+          </p:spPr>
+          <p:txBody>
+            <a:bodyPr anchorCtr="0" anchor="ctr" bIns="0" lIns="0" spcFirstLastPara="1" rIns="0" wrap="square" tIns="0">
+              <a:noAutofit/>
+            </a:bodyPr>
+            <a:lstStyle/>
+            <a:p>
+              <a:pPr indent="0" lvl="0" marL="0" rtl="0" algn="l">
+                <a:spcBef>
+                  <a:spcPts val="0"/>
+                </a:spcBef>
+                <a:spcAft>
+                  <a:spcPts val="0"/>
+                </a:spcAft>
+                <a:buClr>
+                  <a:schemeClr val="dk1"/>
+                </a:buClr>
+                <a:buSzPts val="1100"/>
+                <a:buFont typeface="Arial"/>
+                <a:buNone/>
+              </a:pPr>
+              <a:r>
+                <a:rPr b="1" lang="en-US" sz="1100">
+                  <a:solidFill>
+                    <a:srgbClr val="005088"/>
+                  </a:solidFill>
+                  <a:latin typeface="Arial"/>
+                  <a:ea typeface="Arial"/>
+                  <a:cs typeface="Arial"/>
+                  <a:sym typeface="Arial"/>
+                </a:rPr>
+                <a:t>Métodos de Vector a utilizar: </a:t>
+              </a:r>
+              <a:r>
+                <a:rPr lang="en-US" sz="1100">
+                  <a:solidFill>
+                    <a:srgbClr val="188038"/>
+                  </a:solidFill>
+                </a:rPr>
+                <a:t>add(E e)</a:t>
+              </a:r>
+              <a:r>
+                <a:rPr lang="en-US" sz="1100">
+                  <a:solidFill>
+                    <a:schemeClr val="dk1"/>
+                  </a:solidFill>
+                </a:rPr>
+                <a:t>, </a:t>
+              </a:r>
+              <a:r>
+                <a:rPr lang="en-US" sz="1100">
+                  <a:solidFill>
+                    <a:srgbClr val="188038"/>
+                  </a:solidFill>
+                </a:rPr>
+                <a:t>get(int index)</a:t>
+              </a:r>
+              <a:r>
+                <a:rPr lang="en-US" sz="1100">
+                  <a:solidFill>
+                    <a:schemeClr val="dk1"/>
+                  </a:solidFill>
+                </a:rPr>
+                <a:t>, </a:t>
+              </a:r>
+              <a:r>
+                <a:rPr lang="en-US" sz="1100">
+                  <a:solidFill>
+                    <a:srgbClr val="188038"/>
+                  </a:solidFill>
+                </a:rPr>
+                <a:t>set(int index, E element)</a:t>
+              </a:r>
+              <a:r>
+                <a:rPr lang="en-US" sz="1100">
+                  <a:solidFill>
+                    <a:schemeClr val="dk1"/>
+                  </a:solidFill>
+                </a:rPr>
+                <a:t>, </a:t>
+              </a:r>
+              <a:r>
+                <a:rPr lang="en-US" sz="1100">
+                  <a:solidFill>
+                    <a:srgbClr val="188038"/>
+                  </a:solidFill>
+                </a:rPr>
+                <a:t>size()</a:t>
+              </a:r>
+              <a:r>
+                <a:rPr lang="en-US" sz="1100">
+                  <a:solidFill>
+                    <a:schemeClr val="dk1"/>
+                  </a:solidFill>
+                </a:rPr>
+                <a:t>. </a:t>
+              </a:r>
+              <a:r>
+                <a:rPr lang="en-US" sz="1100">
+                  <a:solidFill>
+                    <a:srgbClr val="188038"/>
+                  </a:solidFill>
+                </a:rPr>
+                <a:t>Math.round()</a:t>
+              </a:r>
+              <a:r>
+                <a:rPr lang="en-US" sz="1100">
+                  <a:solidFill>
+                    <a:schemeClr val="dk1"/>
+                  </a:solidFill>
+                </a:rPr>
+                <a:t>. Bucle </a:t>
+              </a:r>
+              <a:r>
+                <a:rPr lang="en-US" sz="1100">
+                  <a:solidFill>
+                    <a:srgbClr val="188038"/>
+                  </a:solidFill>
+                </a:rPr>
+                <a:t>for</a:t>
+              </a:r>
+              <a:r>
+                <a:rPr lang="en-US" sz="1100">
+                  <a:solidFill>
+                    <a:schemeClr val="dk1"/>
+                  </a:solidFill>
+                </a:rPr>
+                <a:t> clásico</a:t>
+              </a:r>
+              <a:endParaRPr b="1" sz="1100">
+                <a:solidFill>
+                  <a:schemeClr val="dk1"/>
+                </a:solidFill>
+              </a:endParaRPr>
+            </a:p>
+          </p:txBody>
+        </p:sp>
+      </p:grpSp>
+    </p:spTree>
+  </p:cSld>
+  <p:clrMapOvr>
+    <a:masterClrMapping/>
+  </p:clrMapOvr>
+</p:sld>
+</file>
+
+<file path=ppt/slides/slide24.xml><?xml version="1.0" encoding="utf-8"?>
+<p:sld xmlns:a="http://schemas.openxmlformats.org/drawingml/2006/main" xmlns:r="http://schemas.openxmlformats.org/officeDocument/2006/relationships" xmlns:mc="http://schemas.openxmlformats.org/markup-compatibility/2006" xmlns:mv="urn:schemas-microsoft-com:mac:vml" xmlns:p="http://schemas.openxmlformats.org/presentationml/2006/main" xmlns:c="http://schemas.openxmlformats.org/drawingml/2006/chart" xmlns:dgm="http://schemas.openxmlformats.org/drawingml/2006/diagram" xmlns:o="urn:schemas-microsoft-com:office:office" xmlns:v="urn:schemas-microsoft-com:vml" xmlns:pvml="urn:schemas-microsoft-com:office:powerpoint" xmlns:com="http://schemas.openxmlformats.org/drawingml/2006/compatibility" xmlns:p14="http://schemas.microsoft.com/office/powerpoint/2010/main" xmlns:p15="http://schemas.microsoft.com/office/powerpoint/2012/main" xmlns:ahyp="http://schemas.microsoft.com/office/drawing/2018/hyperlinkcolor">
+  <p:cSld>
+    <p:spTree>
+      <p:nvGrpSpPr>
+        <p:cNvPr id="520" name="Shape 520"/>
+        <p:cNvGrpSpPr/>
+        <p:nvPr/>
+      </p:nvGrpSpPr>
+      <p:grpSpPr>
+        <a:xfrm>
+          <a:off x="0" y="0"/>
+          <a:ext cx="0" cy="0"/>
+          <a:chOff x="0" y="0"/>
+          <a:chExt cx="0" cy="0"/>
+        </a:xfrm>
+      </p:grpSpPr>
+      <p:pic>
+        <p:nvPicPr>
+          <p:cNvPr descr="image.png" id="521" name="Google Shape;521;p37"/>
           <p:cNvPicPr preferRelativeResize="0"/>
           <p:nvPr/>
         </p:nvPicPr>
@@ -28010,7 +30276,7 @@
       </p:pic>
       <p:pic>
         <p:nvPicPr>
-          <p:cNvPr descr="image.png" id="488" name="Google Shape;488;p35"/>
+          <p:cNvPr descr="image.png" id="522" name="Google Shape;522;p37"/>
           <p:cNvPicPr preferRelativeResize="0"/>
           <p:nvPr/>
         </p:nvPicPr>
@@ -28037,7 +30303,7 @@
       </p:pic>
       <p:sp>
         <p:nvSpPr>
-          <p:cNvPr id="489" name="Google Shape;489;p35"/>
+          <p:cNvPr id="523" name="Google Shape;523;p37"/>
           <p:cNvSpPr txBox="1"/>
           <p:nvPr/>
         </p:nvSpPr>
@@ -28103,7 +30369,7 @@
       </p:sp>
       <p:sp>
         <p:nvSpPr>
-          <p:cNvPr id="490" name="Google Shape;490;p35"/>
+          <p:cNvPr id="524" name="Google Shape;524;p37"/>
           <p:cNvSpPr txBox="1"/>
           <p:nvPr/>
         </p:nvSpPr>

--- a/I UNIDAD/Presentaciones/I UNIDAD Programación Básica.pptx
+++ b/I UNIDAD/Presentaciones/I UNIDAD Programación Básica.pptx
@@ -32,37 +32,38 @@
     <p:sldId id="277" r:id="rId27"/>
     <p:sldId id="278" r:id="rId28"/>
     <p:sldId id="279" r:id="rId29"/>
+    <p:sldId id="280" r:id="rId30"/>
   </p:sldIdLst>
   <p:sldSz cy="6858000" cx="12192000"/>
   <p:notesSz cx="6858000" cy="9144000"/>
   <p:embeddedFontLst>
     <p:embeddedFont>
       <p:font typeface="DM Sans Medium"/>
-      <p:regular r:id="rId30"/>
-      <p:bold r:id="rId31"/>
-      <p:italic r:id="rId32"/>
-      <p:boldItalic r:id="rId33"/>
+      <p:regular r:id="rId31"/>
+      <p:bold r:id="rId32"/>
+      <p:italic r:id="rId33"/>
+      <p:boldItalic r:id="rId34"/>
     </p:embeddedFont>
     <p:embeddedFont>
       <p:font typeface="Roboto Mono"/>
-      <p:regular r:id="rId34"/>
-      <p:bold r:id="rId35"/>
-      <p:italic r:id="rId36"/>
-      <p:boldItalic r:id="rId37"/>
+      <p:regular r:id="rId35"/>
+      <p:bold r:id="rId36"/>
+      <p:italic r:id="rId37"/>
+      <p:boldItalic r:id="rId38"/>
     </p:embeddedFont>
     <p:embeddedFont>
       <p:font typeface="Merriweather"/>
-      <p:regular r:id="rId38"/>
-      <p:bold r:id="rId39"/>
-      <p:italic r:id="rId40"/>
-      <p:boldItalic r:id="rId41"/>
+      <p:regular r:id="rId39"/>
+      <p:bold r:id="rId40"/>
+      <p:italic r:id="rId41"/>
+      <p:boldItalic r:id="rId42"/>
     </p:embeddedFont>
     <p:embeddedFont>
       <p:font typeface="DM Sans"/>
-      <p:regular r:id="rId42"/>
-      <p:bold r:id="rId43"/>
-      <p:italic r:id="rId44"/>
-      <p:boldItalic r:id="rId45"/>
+      <p:regular r:id="rId43"/>
+      <p:bold r:id="rId44"/>
+      <p:italic r:id="rId45"/>
+      <p:boldItalic r:id="rId46"/>
     </p:embeddedFont>
   </p:embeddedFontLst>
   <p:defaultTextStyle>
@@ -2765,7 +2766,7 @@
       </p:grpSpPr>
       <p:sp>
         <p:nvSpPr>
-          <p:cNvPr id="518" name="Google Shape;518;p12:notes"/>
+          <p:cNvPr id="518" name="Google Shape;518;g3ea94a8f681_0_0:notes"/>
           <p:cNvSpPr txBox="1"/>
           <p:nvPr>
             <p:ph idx="1" type="body"/>
@@ -2812,7 +2813,124 @@
       </p:sp>
       <p:sp>
         <p:nvSpPr>
-          <p:cNvPr id="519" name="Google Shape;519;p12:notes"/>
+          <p:cNvPr id="519" name="Google Shape;519;g3ea94a8f681_0_0:notes"/>
+          <p:cNvSpPr/>
+          <p:nvPr>
+            <p:ph idx="2" type="sldImg"/>
+          </p:nvPr>
+        </p:nvSpPr>
+        <p:spPr>
+          <a:xfrm>
+            <a:off x="1143225" y="685800"/>
+            <a:ext cx="4572300" cy="3429000"/>
+          </a:xfrm>
+          <a:custGeom>
+            <a:rect b="b" l="l" r="r" t="t"/>
+            <a:pathLst>
+              <a:path extrusionOk="0" h="120000" w="120000">
+                <a:moveTo>
+                  <a:pt x="0" y="0"/>
+                </a:moveTo>
+                <a:lnTo>
+                  <a:pt x="120000" y="0"/>
+                </a:lnTo>
+                <a:lnTo>
+                  <a:pt x="120000" y="120000"/>
+                </a:lnTo>
+                <a:lnTo>
+                  <a:pt x="0" y="120000"/>
+                </a:lnTo>
+                <a:close/>
+              </a:path>
+            </a:pathLst>
+          </a:custGeom>
+          <a:noFill/>
+          <a:ln cap="flat" cmpd="sng" w="9525">
+            <a:solidFill>
+              <a:srgbClr val="000000"/>
+            </a:solidFill>
+            <a:prstDash val="solid"/>
+            <a:round/>
+            <a:headEnd len="sm" w="sm" type="none"/>
+            <a:tailEnd len="sm" w="sm" type="none"/>
+          </a:ln>
+        </p:spPr>
+      </p:sp>
+    </p:spTree>
+  </p:cSld>
+  <p:clrMapOvr>
+    <a:masterClrMapping/>
+  </p:clrMapOvr>
+</p:notes>
+</file>
+
+<file path=ppt/notesSlides/notesSlide25.xml><?xml version="1.0" encoding="utf-8"?>
+<p:notes xmlns:a="http://schemas.openxmlformats.org/drawingml/2006/main" xmlns:r="http://schemas.openxmlformats.org/officeDocument/2006/relationships" xmlns:mc="http://schemas.openxmlformats.org/markup-compatibility/2006" xmlns:mv="urn:schemas-microsoft-com:mac:vml" xmlns:p="http://schemas.openxmlformats.org/presentationml/2006/main" xmlns:c="http://schemas.openxmlformats.org/drawingml/2006/chart" xmlns:dgm="http://schemas.openxmlformats.org/drawingml/2006/diagram" xmlns:o="urn:schemas-microsoft-com:office:office" xmlns:v="urn:schemas-microsoft-com:vml" xmlns:pvml="urn:schemas-microsoft-com:office:powerpoint" xmlns:com="http://schemas.openxmlformats.org/drawingml/2006/compatibility" xmlns:p14="http://schemas.microsoft.com/office/powerpoint/2010/main" xmlns:p15="http://schemas.microsoft.com/office/powerpoint/2012/main" xmlns:ahyp="http://schemas.microsoft.com/office/drawing/2018/hyperlinkcolor" showMasterPhAnim="0" showMasterSp="0">
+  <p:cSld>
+    <p:spTree>
+      <p:nvGrpSpPr>
+        <p:cNvPr id="530" name="Shape 530"/>
+        <p:cNvGrpSpPr/>
+        <p:nvPr/>
+      </p:nvGrpSpPr>
+      <p:grpSpPr>
+        <a:xfrm>
+          <a:off x="0" y="0"/>
+          <a:ext cx="0" cy="0"/>
+          <a:chOff x="0" y="0"/>
+          <a:chExt cx="0" cy="0"/>
+        </a:xfrm>
+      </p:grpSpPr>
+      <p:sp>
+        <p:nvSpPr>
+          <p:cNvPr id="531" name="Google Shape;531;p12:notes"/>
+          <p:cNvSpPr txBox="1"/>
+          <p:nvPr>
+            <p:ph idx="1" type="body"/>
+          </p:nvPr>
+        </p:nvSpPr>
+        <p:spPr>
+          <a:xfrm>
+            <a:off x="685800" y="4343400"/>
+            <a:ext cx="5486400" cy="4114800"/>
+          </a:xfrm>
+          <a:prstGeom prst="rect">
+            <a:avLst/>
+          </a:prstGeom>
+          <a:noFill/>
+          <a:ln>
+            <a:noFill/>
+          </a:ln>
+        </p:spPr>
+        <p:txBody>
+          <a:bodyPr anchorCtr="0" anchor="t" bIns="91425" lIns="91425" spcFirstLastPara="1" rIns="91425" wrap="square" tIns="91425">
+            <a:noAutofit/>
+          </a:bodyPr>
+          <a:lstStyle/>
+          <a:p>
+            <a:pPr indent="0" lvl="0" marL="0" rtl="0" algn="l">
+              <a:lnSpc>
+                <a:spcPct val="100000"/>
+              </a:lnSpc>
+              <a:spcBef>
+                <a:spcPts val="0"/>
+              </a:spcBef>
+              <a:spcAft>
+                <a:spcPts val="0"/>
+              </a:spcAft>
+              <a:buSzPts val="1100"/>
+              <a:buNone/>
+            </a:pPr>
+            <a:r>
+              <a:t/>
+            </a:r>
+            <a:endParaRPr/>
+          </a:p>
+        </p:txBody>
+      </p:sp>
+      <p:sp>
+        <p:nvSpPr>
+          <p:cNvPr id="532" name="Google Shape;532;p12:notes"/>
           <p:cNvSpPr/>
           <p:nvPr>
             <p:ph idx="2" type="sldImg"/>
@@ -30233,6 +30351,18 @@
 <file path=ppt/slides/slide24.xml><?xml version="1.0" encoding="utf-8"?>
 <p:sld xmlns:a="http://schemas.openxmlformats.org/drawingml/2006/main" xmlns:r="http://schemas.openxmlformats.org/officeDocument/2006/relationships" xmlns:mc="http://schemas.openxmlformats.org/markup-compatibility/2006" xmlns:mv="urn:schemas-microsoft-com:mac:vml" xmlns:p="http://schemas.openxmlformats.org/presentationml/2006/main" xmlns:c="http://schemas.openxmlformats.org/drawingml/2006/chart" xmlns:dgm="http://schemas.openxmlformats.org/drawingml/2006/diagram" xmlns:o="urn:schemas-microsoft-com:office:office" xmlns:v="urn:schemas-microsoft-com:vml" xmlns:pvml="urn:schemas-microsoft-com:office:powerpoint" xmlns:com="http://schemas.openxmlformats.org/drawingml/2006/compatibility" xmlns:p14="http://schemas.microsoft.com/office/powerpoint/2010/main" xmlns:p15="http://schemas.microsoft.com/office/powerpoint/2012/main" xmlns:ahyp="http://schemas.microsoft.com/office/drawing/2018/hyperlinkcolor">
   <p:cSld>
+    <p:bg>
+      <p:bgPr>
+        <a:blipFill>
+          <a:blip r:embed="rId3">
+            <a:alphaModFix/>
+          </a:blip>
+          <a:stretch>
+            <a:fillRect/>
+          </a:stretch>
+        </a:blipFill>
+      </p:bgPr>
+    </p:bg>
     <p:spTree>
       <p:nvGrpSpPr>
         <p:cNvPr id="520" name="Shape 520"/>
@@ -30249,7 +30379,1072 @@
       </p:grpSpPr>
       <p:pic>
         <p:nvPicPr>
-          <p:cNvPr descr="image.png" id="521" name="Google Shape;521;p37"/>
+          <p:cNvPr id="521" name="Google Shape;521;p37"/>
+          <p:cNvPicPr preferRelativeResize="0"/>
+          <p:nvPr/>
+        </p:nvPicPr>
+        <p:blipFill rotWithShape="1">
+          <a:blip r:embed="rId4">
+            <a:alphaModFix/>
+          </a:blip>
+          <a:srcRect b="0" l="0" r="0" t="0"/>
+          <a:stretch/>
+        </p:blipFill>
+        <p:spPr>
+          <a:xfrm>
+            <a:off x="0" y="0"/>
+            <a:ext cx="12192000" cy="6858000"/>
+          </a:xfrm>
+          <a:prstGeom prst="rect">
+            <a:avLst/>
+          </a:prstGeom>
+          <a:noFill/>
+          <a:ln>
+            <a:noFill/>
+          </a:ln>
+        </p:spPr>
+      </p:pic>
+      <p:sp>
+        <p:nvSpPr>
+          <p:cNvPr id="522" name="Google Shape;522;p37"/>
+          <p:cNvSpPr/>
+          <p:nvPr/>
+        </p:nvSpPr>
+        <p:spPr>
+          <a:xfrm>
+            <a:off x="0" y="0"/>
+            <a:ext cx="12192000" cy="952500"/>
+          </a:xfrm>
+          <a:prstGeom prst="rect">
+            <a:avLst/>
+          </a:prstGeom>
+          <a:solidFill>
+            <a:srgbClr val="FFFFFF">
+              <a:alpha val="60000"/>
+            </a:srgbClr>
+          </a:solidFill>
+          <a:ln>
+            <a:noFill/>
+          </a:ln>
+        </p:spPr>
+        <p:txBody>
+          <a:bodyPr anchorCtr="0" anchor="ctr" bIns="0" lIns="0" spcFirstLastPara="1" rIns="0" wrap="square" tIns="0">
+            <a:noAutofit/>
+          </a:bodyPr>
+          <a:lstStyle/>
+          <a:p>
+            <a:pPr indent="0" lvl="0" marL="0" rtl="0" algn="l">
+              <a:spcBef>
+                <a:spcPts val="0"/>
+              </a:spcBef>
+              <a:spcAft>
+                <a:spcPts val="0"/>
+              </a:spcAft>
+              <a:buNone/>
+            </a:pPr>
+            <a:r>
+              <a:t/>
+            </a:r>
+            <a:endParaRPr/>
+          </a:p>
+        </p:txBody>
+      </p:sp>
+      <p:sp>
+        <p:nvSpPr>
+          <p:cNvPr id="523" name="Google Shape;523;p37"/>
+          <p:cNvSpPr txBox="1"/>
+          <p:nvPr/>
+        </p:nvSpPr>
+        <p:spPr>
+          <a:xfrm>
+            <a:off x="476250" y="67575"/>
+            <a:ext cx="11239500" cy="1074300"/>
+          </a:xfrm>
+          <a:prstGeom prst="rect">
+            <a:avLst/>
+          </a:prstGeom>
+          <a:noFill/>
+          <a:ln>
+            <a:noFill/>
+          </a:ln>
+        </p:spPr>
+        <p:txBody>
+          <a:bodyPr anchorCtr="0" anchor="ctr" bIns="0" lIns="0" spcFirstLastPara="1" rIns="0" wrap="square" tIns="0">
+            <a:noAutofit/>
+          </a:bodyPr>
+          <a:lstStyle/>
+          <a:p>
+            <a:pPr indent="0" lvl="0" marL="0" rtl="0" algn="l">
+              <a:spcBef>
+                <a:spcPts val="0"/>
+              </a:spcBef>
+              <a:spcAft>
+                <a:spcPts val="0"/>
+              </a:spcAft>
+              <a:buNone/>
+            </a:pPr>
+            <a:r>
+              <a:rPr b="1" lang="en-US" sz="3200">
+                <a:solidFill>
+                  <a:srgbClr val="005088"/>
+                </a:solidFill>
+                <a:latin typeface="Merriweather"/>
+                <a:ea typeface="Merriweather"/>
+                <a:cs typeface="Merriweather"/>
+                <a:sym typeface="Merriweather"/>
+              </a:rPr>
+              <a:t>Ejemplo 4: </a:t>
+            </a:r>
+            <a:r>
+              <a:rPr b="1" lang="en-US" sz="3200">
+                <a:solidFill>
+                  <a:srgbClr val="005088"/>
+                </a:solidFill>
+                <a:latin typeface="Merriweather"/>
+                <a:ea typeface="Merriweather"/>
+                <a:cs typeface="Merriweather"/>
+                <a:sym typeface="Merriweather"/>
+              </a:rPr>
+              <a:t>Historial de Viajes de una App de Transporte</a:t>
+            </a:r>
+            <a:endParaRPr b="1" sz="3200">
+              <a:solidFill>
+                <a:srgbClr val="005088"/>
+              </a:solidFill>
+              <a:latin typeface="Merriweather"/>
+              <a:ea typeface="Merriweather"/>
+              <a:cs typeface="Merriweather"/>
+              <a:sym typeface="Merriweather"/>
+            </a:endParaRPr>
+          </a:p>
+        </p:txBody>
+      </p:sp>
+      <p:sp>
+        <p:nvSpPr>
+          <p:cNvPr id="524" name="Google Shape;524;p37"/>
+          <p:cNvSpPr/>
+          <p:nvPr/>
+        </p:nvSpPr>
+        <p:spPr>
+          <a:xfrm>
+            <a:off x="476250" y="1333500"/>
+            <a:ext cx="11239500" cy="4953000"/>
+          </a:xfrm>
+          <a:prstGeom prst="roundRect">
+            <a:avLst>
+              <a:gd fmla="val 1923" name="adj"/>
+            </a:avLst>
+          </a:prstGeom>
+          <a:solidFill>
+            <a:srgbClr val="FFFFFF">
+              <a:alpha val="90000"/>
+            </a:srgbClr>
+          </a:solidFill>
+          <a:ln cap="flat" cmpd="sng" w="9525">
+            <a:solidFill>
+              <a:srgbClr val="005088"/>
+            </a:solidFill>
+            <a:prstDash val="solid"/>
+            <a:round/>
+            <a:headEnd len="sm" w="sm" type="none"/>
+            <a:tailEnd len="sm" w="sm" type="none"/>
+          </a:ln>
+        </p:spPr>
+        <p:txBody>
+          <a:bodyPr anchorCtr="0" anchor="ctr" bIns="0" lIns="0" spcFirstLastPara="1" rIns="0" wrap="square" tIns="0">
+            <a:noAutofit/>
+          </a:bodyPr>
+          <a:lstStyle/>
+          <a:p>
+            <a:pPr indent="0" lvl="0" marL="0" rtl="0" algn="l">
+              <a:spcBef>
+                <a:spcPts val="0"/>
+              </a:spcBef>
+              <a:spcAft>
+                <a:spcPts val="0"/>
+              </a:spcAft>
+              <a:buNone/>
+            </a:pPr>
+            <a:r>
+              <a:t/>
+            </a:r>
+            <a:endParaRPr/>
+          </a:p>
+        </p:txBody>
+      </p:sp>
+      <p:grpSp>
+        <p:nvGrpSpPr>
+          <p:cNvPr id="525" name="Google Shape;525;p37"/>
+          <p:cNvGrpSpPr/>
+          <p:nvPr/>
+        </p:nvGrpSpPr>
+        <p:grpSpPr>
+          <a:xfrm>
+            <a:off x="715625" y="1428750"/>
+            <a:ext cx="10809625" cy="4762642"/>
+            <a:chOff x="715625" y="1523999"/>
+            <a:chExt cx="10809625" cy="4571990"/>
+          </a:xfrm>
+        </p:grpSpPr>
+        <p:sp>
+          <p:nvSpPr>
+            <p:cNvPr id="526" name="Google Shape;526;p37"/>
+            <p:cNvSpPr txBox="1"/>
+            <p:nvPr/>
+          </p:nvSpPr>
+          <p:spPr>
+            <a:xfrm>
+              <a:off x="819975" y="1523999"/>
+              <a:ext cx="10705200" cy="381000"/>
+            </a:xfrm>
+            <a:prstGeom prst="rect">
+              <a:avLst/>
+            </a:prstGeom>
+            <a:noFill/>
+            <a:ln>
+              <a:noFill/>
+            </a:ln>
+          </p:spPr>
+          <p:txBody>
+            <a:bodyPr anchorCtr="0" anchor="ctr" bIns="0" lIns="0" spcFirstLastPara="1" rIns="0" wrap="square" tIns="0">
+              <a:noAutofit/>
+            </a:bodyPr>
+            <a:lstStyle/>
+            <a:p>
+              <a:pPr indent="0" lvl="0" marL="0" rtl="0" algn="l">
+                <a:spcBef>
+                  <a:spcPts val="0"/>
+                </a:spcBef>
+                <a:spcAft>
+                  <a:spcPts val="0"/>
+                </a:spcAft>
+                <a:buNone/>
+              </a:pPr>
+              <a:r>
+                <a:rPr b="1" lang="en-US" sz="1800">
+                  <a:solidFill>
+                    <a:srgbClr val="005088"/>
+                  </a:solidFill>
+                  <a:latin typeface="Merriweather"/>
+                  <a:ea typeface="Merriweather"/>
+                  <a:cs typeface="Merriweather"/>
+                  <a:sym typeface="Merriweather"/>
+                </a:rPr>
+                <a:t>Planteamiento y Lógica</a:t>
+              </a:r>
+              <a:endParaRPr b="1" sz="1800">
+                <a:solidFill>
+                  <a:srgbClr val="005088"/>
+                </a:solidFill>
+                <a:latin typeface="Merriweather"/>
+                <a:ea typeface="Merriweather"/>
+                <a:cs typeface="Merriweather"/>
+                <a:sym typeface="Merriweather"/>
+              </a:endParaRPr>
+            </a:p>
+          </p:txBody>
+        </p:sp>
+        <p:sp>
+          <p:nvSpPr>
+            <p:cNvPr id="527" name="Google Shape;527;p37"/>
+            <p:cNvSpPr txBox="1"/>
+            <p:nvPr/>
+          </p:nvSpPr>
+          <p:spPr>
+            <a:xfrm>
+              <a:off x="715625" y="2000240"/>
+              <a:ext cx="10809600" cy="3482400"/>
+            </a:xfrm>
+            <a:prstGeom prst="rect">
+              <a:avLst/>
+            </a:prstGeom>
+            <a:noFill/>
+            <a:ln>
+              <a:noFill/>
+            </a:ln>
+          </p:spPr>
+          <p:txBody>
+            <a:bodyPr anchorCtr="0" anchor="t" bIns="0" lIns="0" spcFirstLastPara="1" rIns="0" wrap="square" tIns="0">
+              <a:noAutofit/>
+            </a:bodyPr>
+            <a:lstStyle/>
+            <a:p>
+              <a:pPr indent="-304800" lvl="0" marL="457200" rtl="0" algn="l">
+                <a:lnSpc>
+                  <a:spcPct val="115000"/>
+                </a:lnSpc>
+                <a:spcBef>
+                  <a:spcPts val="0"/>
+                </a:spcBef>
+                <a:spcAft>
+                  <a:spcPts val="0"/>
+                </a:spcAft>
+                <a:buClr>
+                  <a:schemeClr val="dk1"/>
+                </a:buClr>
+                <a:buSzPts val="1200"/>
+                <a:buAutoNum type="arabicPeriod"/>
+              </a:pPr>
+              <a:r>
+                <a:rPr lang="en-US" sz="1200">
+                  <a:solidFill>
+                    <a:schemeClr val="dk1"/>
+                  </a:solidFill>
+                </a:rPr>
+                <a:t>Instancia una matriz dinámica llamada </a:t>
+              </a:r>
+              <a:r>
+                <a:rPr lang="en-US" sz="1200">
+                  <a:solidFill>
+                    <a:srgbClr val="188038"/>
+                  </a:solidFill>
+                </a:rPr>
+                <a:t>historialViajes</a:t>
+              </a:r>
+              <a:r>
+                <a:rPr lang="en-US" sz="1200">
+                  <a:solidFill>
+                    <a:schemeClr val="dk1"/>
+                  </a:solidFill>
+                </a:rPr>
+                <a:t>. Cada fila representará un servicio completado con el formato: </a:t>
+              </a:r>
+              <a:r>
+                <a:rPr lang="en-US" sz="1200">
+                  <a:solidFill>
+                    <a:srgbClr val="188038"/>
+                  </a:solidFill>
+                </a:rPr>
+                <a:t>[Nombre del Conductor, Distancia Recorrida (km), Tarifa Calculada (L.)]</a:t>
+              </a:r>
+              <a:r>
+                <a:rPr lang="en-US" sz="1200">
+                  <a:solidFill>
+                    <a:schemeClr val="dk1"/>
+                  </a:solidFill>
+                </a:rPr>
+                <a:t>.</a:t>
+              </a:r>
+              <a:endParaRPr sz="1200">
+                <a:solidFill>
+                  <a:schemeClr val="dk1"/>
+                </a:solidFill>
+              </a:endParaRPr>
+            </a:p>
+            <a:p>
+              <a:pPr indent="-304800" lvl="0" marL="457200" rtl="0" algn="l">
+                <a:lnSpc>
+                  <a:spcPct val="115000"/>
+                </a:lnSpc>
+                <a:spcBef>
+                  <a:spcPts val="0"/>
+                </a:spcBef>
+                <a:spcAft>
+                  <a:spcPts val="0"/>
+                </a:spcAft>
+                <a:buClr>
+                  <a:schemeClr val="dk1"/>
+                </a:buClr>
+                <a:buSzPts val="1200"/>
+                <a:buAutoNum type="arabicPeriod"/>
+              </a:pPr>
+              <a:r>
+                <a:rPr lang="en-US" sz="1200">
+                  <a:solidFill>
+                    <a:schemeClr val="dk1"/>
+                  </a:solidFill>
+                </a:rPr>
+                <a:t> Al iniciar el programa, la matriz debe cargar los siguientes servicios iniciales:</a:t>
+              </a:r>
+              <a:endParaRPr sz="1200">
+                <a:solidFill>
+                  <a:schemeClr val="dk1"/>
+                </a:solidFill>
+              </a:endParaRPr>
+            </a:p>
+            <a:p>
+              <a:pPr indent="-304800" lvl="1" marL="914400" rtl="0" algn="l">
+                <a:lnSpc>
+                  <a:spcPct val="115000"/>
+                </a:lnSpc>
+                <a:spcBef>
+                  <a:spcPts val="0"/>
+                </a:spcBef>
+                <a:spcAft>
+                  <a:spcPts val="0"/>
+                </a:spcAft>
+                <a:buClr>
+                  <a:schemeClr val="dk1"/>
+                </a:buClr>
+                <a:buSzPts val="1200"/>
+                <a:buChar char="○"/>
+              </a:pPr>
+              <a:r>
+                <a:rPr lang="en-US" sz="1200">
+                  <a:solidFill>
+                    <a:schemeClr val="dk1"/>
+                  </a:solidFill>
+                </a:rPr>
+                <a:t>Fila 0: </a:t>
+              </a:r>
+              <a:r>
+                <a:rPr lang="en-US" sz="1200">
+                  <a:solidFill>
+                    <a:srgbClr val="188038"/>
+                  </a:solidFill>
+                </a:rPr>
+                <a:t>["Juan P.", 14.6, 155.75]</a:t>
+              </a:r>
+              <a:endParaRPr sz="1200">
+                <a:solidFill>
+                  <a:srgbClr val="188038"/>
+                </a:solidFill>
+              </a:endParaRPr>
+            </a:p>
+            <a:p>
+              <a:pPr indent="-304800" lvl="1" marL="914400" rtl="0" algn="l">
+                <a:lnSpc>
+                  <a:spcPct val="115000"/>
+                </a:lnSpc>
+                <a:spcBef>
+                  <a:spcPts val="0"/>
+                </a:spcBef>
+                <a:spcAft>
+                  <a:spcPts val="0"/>
+                </a:spcAft>
+                <a:buClr>
+                  <a:schemeClr val="dk1"/>
+                </a:buClr>
+                <a:buSzPts val="1200"/>
+                <a:buChar char="○"/>
+              </a:pPr>
+              <a:r>
+                <a:rPr lang="en-US" sz="1200">
+                  <a:solidFill>
+                    <a:schemeClr val="dk1"/>
+                  </a:solidFill>
+                </a:rPr>
+                <a:t>Fila 1: </a:t>
+              </a:r>
+              <a:r>
+                <a:rPr lang="en-US" sz="1200">
+                  <a:solidFill>
+                    <a:srgbClr val="188038"/>
+                  </a:solidFill>
+                </a:rPr>
+                <a:t>["Elena R.", 5.2, 60.40]</a:t>
+              </a:r>
+              <a:endParaRPr sz="1200">
+                <a:solidFill>
+                  <a:srgbClr val="188038"/>
+                </a:solidFill>
+              </a:endParaRPr>
+            </a:p>
+            <a:p>
+              <a:pPr indent="-304800" lvl="1" marL="914400" rtl="0" algn="l">
+                <a:lnSpc>
+                  <a:spcPct val="115000"/>
+                </a:lnSpc>
+                <a:spcBef>
+                  <a:spcPts val="0"/>
+                </a:spcBef>
+                <a:spcAft>
+                  <a:spcPts val="0"/>
+                </a:spcAft>
+                <a:buClr>
+                  <a:schemeClr val="dk1"/>
+                </a:buClr>
+                <a:buSzPts val="1200"/>
+                <a:buChar char="○"/>
+              </a:pPr>
+              <a:r>
+                <a:rPr lang="en-US" sz="1200">
+                  <a:solidFill>
+                    <a:schemeClr val="dk1"/>
+                  </a:solidFill>
+                </a:rPr>
+                <a:t>Fila 2: </a:t>
+              </a:r>
+              <a:r>
+                <a:rPr lang="en-US" sz="1200">
+                  <a:solidFill>
+                    <a:srgbClr val="188038"/>
+                  </a:solidFill>
+                </a:rPr>
+                <a:t>["Luis M.", 22.8, 240.15]</a:t>
+              </a:r>
+              <a:endParaRPr sz="1200">
+                <a:solidFill>
+                  <a:srgbClr val="188038"/>
+                </a:solidFill>
+              </a:endParaRPr>
+            </a:p>
+            <a:p>
+              <a:pPr indent="-304800" lvl="0" marL="457200" rtl="0" algn="l">
+                <a:lnSpc>
+                  <a:spcPct val="115000"/>
+                </a:lnSpc>
+                <a:spcBef>
+                  <a:spcPts val="0"/>
+                </a:spcBef>
+                <a:spcAft>
+                  <a:spcPts val="0"/>
+                </a:spcAft>
+                <a:buClr>
+                  <a:schemeClr val="dk1"/>
+                </a:buClr>
+                <a:buSzPts val="1200"/>
+                <a:buAutoNum type="arabicPeriod"/>
+              </a:pPr>
+              <a:r>
+                <a:rPr b="1" lang="en-US" sz="1200">
+                  <a:solidFill>
+                    <a:schemeClr val="dk1"/>
+                  </a:solidFill>
+                </a:rPr>
+                <a:t>Registro:</a:t>
+              </a:r>
+              <a:r>
+                <a:rPr lang="en-US" sz="1200">
+                  <a:solidFill>
+                    <a:schemeClr val="dk1"/>
+                  </a:solidFill>
+                </a:rPr>
+                <a:t> Un conductor reporta un viaje que se quedó pegado en la caché del celular. Agrega un nuevo viaje al final de la matriz: </a:t>
+              </a:r>
+              <a:r>
+                <a:rPr lang="en-US" sz="1200">
+                  <a:solidFill>
+                    <a:srgbClr val="188038"/>
+                  </a:solidFill>
+                </a:rPr>
+                <a:t>["Sonia T.", 9.4, 95.80]</a:t>
+              </a:r>
+              <a:r>
+                <a:rPr lang="en-US" sz="1200">
+                  <a:solidFill>
+                    <a:schemeClr val="dk1"/>
+                  </a:solidFill>
+                </a:rPr>
+                <a:t>.</a:t>
+              </a:r>
+              <a:endParaRPr sz="1200">
+                <a:solidFill>
+                  <a:schemeClr val="dk1"/>
+                </a:solidFill>
+              </a:endParaRPr>
+            </a:p>
+            <a:p>
+              <a:pPr indent="-304800" lvl="0" marL="457200" rtl="0" algn="l">
+                <a:lnSpc>
+                  <a:spcPct val="115000"/>
+                </a:lnSpc>
+                <a:spcBef>
+                  <a:spcPts val="0"/>
+                </a:spcBef>
+                <a:spcAft>
+                  <a:spcPts val="0"/>
+                </a:spcAft>
+                <a:buClr>
+                  <a:schemeClr val="dk1"/>
+                </a:buClr>
+                <a:buSzPts val="1200"/>
+                <a:buAutoNum type="arabicPeriod"/>
+              </a:pPr>
+              <a:r>
+                <a:rPr b="1" lang="en-US" sz="1200">
+                  <a:solidFill>
+                    <a:schemeClr val="dk1"/>
+                  </a:solidFill>
+                </a:rPr>
+                <a:t>Cancelaciones:</a:t>
+              </a:r>
+              <a:r>
+                <a:rPr lang="en-US" sz="1200">
+                  <a:solidFill>
+                    <a:schemeClr val="dk1"/>
+                  </a:solidFill>
+                </a:rPr>
+                <a:t> El departamento de soporte técnico reporta que el viaje de </a:t>
+              </a:r>
+              <a:r>
+                <a:rPr b="1" lang="en-US" sz="1200">
+                  <a:solidFill>
+                    <a:schemeClr val="dk1"/>
+                  </a:solidFill>
+                </a:rPr>
+                <a:t>"Elena R."</a:t>
+              </a:r>
+              <a:r>
+                <a:rPr lang="en-US" sz="1200">
+                  <a:solidFill>
+                    <a:schemeClr val="dk1"/>
+                  </a:solidFill>
+                </a:rPr>
+                <a:t> fue cancelado por el usuario debido a un cobro indebido. El programa debe buscar y </a:t>
+              </a:r>
+              <a:r>
+                <a:rPr b="1" lang="en-US" sz="1200">
+                  <a:solidFill>
+                    <a:schemeClr val="dk1"/>
+                  </a:solidFill>
+                </a:rPr>
+                <a:t>eliminar la fila completa</a:t>
+              </a:r>
+              <a:r>
+                <a:rPr lang="en-US" sz="1200">
+                  <a:solidFill>
+                    <a:schemeClr val="dk1"/>
+                  </a:solidFill>
+                </a:rPr>
+                <a:t> de este viaje, garantizando que la estructura reduzca su tamaño</a:t>
+              </a:r>
+              <a:endParaRPr sz="1200">
+                <a:solidFill>
+                  <a:schemeClr val="dk1"/>
+                </a:solidFill>
+              </a:endParaRPr>
+            </a:p>
+            <a:p>
+              <a:pPr indent="-304800" lvl="0" marL="457200" rtl="0" algn="l">
+                <a:lnSpc>
+                  <a:spcPct val="115000"/>
+                </a:lnSpc>
+                <a:spcBef>
+                  <a:spcPts val="0"/>
+                </a:spcBef>
+                <a:spcAft>
+                  <a:spcPts val="0"/>
+                </a:spcAft>
+                <a:buClr>
+                  <a:schemeClr val="dk1"/>
+                </a:buClr>
+                <a:buSzPts val="1200"/>
+                <a:buAutoNum type="arabicPeriod"/>
+              </a:pPr>
+              <a:r>
+                <a:rPr b="1" lang="en-US" sz="1200">
+                  <a:solidFill>
+                    <a:schemeClr val="dk1"/>
+                  </a:solidFill>
+                </a:rPr>
+                <a:t>Auditoría:</a:t>
+              </a:r>
+              <a:r>
+                <a:rPr lang="en-US" sz="1200">
+                  <a:solidFill>
+                    <a:schemeClr val="dk1"/>
+                  </a:solidFill>
+                </a:rPr>
+                <a:t> El departamento de finanzas exige eliminar los centavos del historial para facilitar las transferencias. Ejecuta un ciclo que recorra la matriz restante, extraiga la tarifa monetaria de cada fila, </a:t>
+              </a:r>
+              <a:r>
+                <a:rPr b="1" lang="en-US" sz="1200">
+                  <a:solidFill>
+                    <a:schemeClr val="dk1"/>
+                  </a:solidFill>
+                </a:rPr>
+                <a:t>la redondee al entero más cercano</a:t>
+              </a:r>
+              <a:r>
+                <a:rPr lang="en-US" sz="1200">
+                  <a:solidFill>
+                    <a:schemeClr val="dk1"/>
+                  </a:solidFill>
+                </a:rPr>
+                <a:t> usando </a:t>
+              </a:r>
+              <a:r>
+                <a:rPr lang="en-US" sz="1200">
+                  <a:solidFill>
+                    <a:srgbClr val="188038"/>
+                  </a:solidFill>
+                </a:rPr>
+                <a:t>Math.round()</a:t>
+              </a:r>
+              <a:r>
+                <a:rPr lang="en-US" sz="1200">
+                  <a:solidFill>
+                    <a:schemeClr val="dk1"/>
+                  </a:solidFill>
+                </a:rPr>
+                <a:t> y guarde el precio corregido exactamente en la misma celda de la matriz.</a:t>
+              </a:r>
+              <a:endParaRPr sz="1200">
+                <a:solidFill>
+                  <a:schemeClr val="dk1"/>
+                </a:solidFill>
+              </a:endParaRPr>
+            </a:p>
+            <a:p>
+              <a:pPr indent="-304800" lvl="0" marL="457200" rtl="0" algn="l">
+                <a:lnSpc>
+                  <a:spcPct val="115000"/>
+                </a:lnSpc>
+                <a:spcBef>
+                  <a:spcPts val="0"/>
+                </a:spcBef>
+                <a:spcAft>
+                  <a:spcPts val="0"/>
+                </a:spcAft>
+                <a:buClr>
+                  <a:schemeClr val="dk1"/>
+                </a:buClr>
+                <a:buSzPts val="1200"/>
+                <a:buAutoNum type="arabicPeriod"/>
+              </a:pPr>
+              <a:r>
+                <a:rPr b="1" lang="en-US" sz="1200">
+                  <a:solidFill>
+                    <a:schemeClr val="dk1"/>
+                  </a:solidFill>
+                </a:rPr>
+                <a:t>Bonificación:</a:t>
+              </a:r>
+              <a:r>
+                <a:rPr lang="en-US" sz="1200">
+                  <a:solidFill>
+                    <a:schemeClr val="dk1"/>
+                  </a:solidFill>
+                </a:rPr>
+                <a:t> La empresa dará un bono al conductor que haya hecho un viaje largo (mayor a 20 km). Recorre la matriz buscando en la columna de distancia; si encuentras un registro que cumpla la condición, imprime en pantalla: </a:t>
+              </a:r>
+              <a:r>
+                <a:rPr i="1" lang="en-US" sz="1200">
+                  <a:solidFill>
+                    <a:schemeClr val="dk1"/>
+                  </a:solidFill>
+                </a:rPr>
+                <a:t>"¡Bono aprobado para el conductor [Nombre] por su viaje de [Distancia] km!"</a:t>
+              </a:r>
+              <a:r>
+                <a:rPr lang="en-US" sz="1200">
+                  <a:solidFill>
+                    <a:schemeClr val="dk1"/>
+                  </a:solidFill>
+                </a:rPr>
+                <a:t>.</a:t>
+              </a:r>
+              <a:endParaRPr sz="1200">
+                <a:solidFill>
+                  <a:schemeClr val="dk1"/>
+                </a:solidFill>
+              </a:endParaRPr>
+            </a:p>
+            <a:p>
+              <a:pPr indent="-304800" lvl="0" marL="457200" rtl="0" algn="l">
+                <a:lnSpc>
+                  <a:spcPct val="115000"/>
+                </a:lnSpc>
+                <a:spcBef>
+                  <a:spcPts val="0"/>
+                </a:spcBef>
+                <a:spcAft>
+                  <a:spcPts val="0"/>
+                </a:spcAft>
+                <a:buClr>
+                  <a:schemeClr val="dk1"/>
+                </a:buClr>
+                <a:buSzPts val="1200"/>
+                <a:buAutoNum type="arabicPeriod"/>
+              </a:pPr>
+              <a:r>
+                <a:rPr b="1" lang="en-US" sz="1200">
+                  <a:solidFill>
+                    <a:schemeClr val="dk1"/>
+                  </a:solidFill>
+                </a:rPr>
+                <a:t>Reporte de Liquidación:</a:t>
+              </a:r>
+              <a:r>
+                <a:rPr lang="en-US" sz="1200">
+                  <a:solidFill>
+                    <a:schemeClr val="dk1"/>
+                  </a:solidFill>
+                </a:rPr>
+                <a:t> Utilizando un bucle optimizado de solo lectura, recorre e imprime el historial final depurado con el formato: </a:t>
+              </a:r>
+              <a:r>
+                <a:rPr lang="en-US" sz="1200">
+                  <a:solidFill>
+                    <a:srgbClr val="188038"/>
+                  </a:solidFill>
+                </a:rPr>
+                <a:t>Conductor: [Nombre] | Distancia: [Km] | Tarifa Final: L. [Valor]</a:t>
+              </a:r>
+              <a:r>
+                <a:rPr lang="en-US" sz="1200">
+                  <a:solidFill>
+                    <a:schemeClr val="dk1"/>
+                  </a:solidFill>
+                </a:rPr>
+                <a:t>.</a:t>
+              </a:r>
+              <a:endParaRPr b="1" sz="2000">
+                <a:solidFill>
+                  <a:srgbClr val="121212"/>
+                </a:solidFill>
+                <a:latin typeface="Arial"/>
+                <a:ea typeface="Arial"/>
+                <a:cs typeface="Arial"/>
+                <a:sym typeface="Arial"/>
+              </a:endParaRPr>
+            </a:p>
+          </p:txBody>
+        </p:sp>
+        <p:sp>
+          <p:nvSpPr>
+            <p:cNvPr id="528" name="Google Shape;528;p37"/>
+            <p:cNvSpPr/>
+            <p:nvPr/>
+          </p:nvSpPr>
+          <p:spPr>
+            <a:xfrm>
+              <a:off x="4476750" y="5609989"/>
+              <a:ext cx="7048500" cy="486000"/>
+            </a:xfrm>
+            <a:prstGeom prst="roundRect">
+              <a:avLst>
+                <a:gd fmla="val 6250" name="adj"/>
+              </a:avLst>
+            </a:prstGeom>
+            <a:solidFill>
+              <a:srgbClr val="E8F0FE"/>
+            </a:solidFill>
+            <a:ln>
+              <a:noFill/>
+            </a:ln>
+          </p:spPr>
+          <p:txBody>
+            <a:bodyPr anchorCtr="0" anchor="ctr" bIns="0" lIns="0" spcFirstLastPara="1" rIns="0" wrap="square" tIns="0">
+              <a:noAutofit/>
+            </a:bodyPr>
+            <a:lstStyle/>
+            <a:p>
+              <a:pPr indent="0" lvl="0" marL="0" rtl="0" algn="l">
+                <a:spcBef>
+                  <a:spcPts val="0"/>
+                </a:spcBef>
+                <a:spcAft>
+                  <a:spcPts val="0"/>
+                </a:spcAft>
+                <a:buNone/>
+              </a:pPr>
+              <a:r>
+                <a:t/>
+              </a:r>
+              <a:endParaRPr/>
+            </a:p>
+          </p:txBody>
+        </p:sp>
+        <p:sp>
+          <p:nvSpPr>
+            <p:cNvPr id="529" name="Google Shape;529;p37"/>
+            <p:cNvSpPr txBox="1"/>
+            <p:nvPr/>
+          </p:nvSpPr>
+          <p:spPr>
+            <a:xfrm>
+              <a:off x="819975" y="5577878"/>
+              <a:ext cx="10610100" cy="486000"/>
+            </a:xfrm>
+            <a:prstGeom prst="rect">
+              <a:avLst/>
+            </a:prstGeom>
+            <a:noFill/>
+            <a:ln>
+              <a:noFill/>
+            </a:ln>
+          </p:spPr>
+          <p:txBody>
+            <a:bodyPr anchorCtr="0" anchor="ctr" bIns="0" lIns="0" spcFirstLastPara="1" rIns="0" wrap="square" tIns="0">
+              <a:noAutofit/>
+            </a:bodyPr>
+            <a:lstStyle/>
+            <a:p>
+              <a:pPr indent="0" lvl="0" marL="0" rtl="0" algn="l">
+                <a:spcBef>
+                  <a:spcPts val="0"/>
+                </a:spcBef>
+                <a:spcAft>
+                  <a:spcPts val="0"/>
+                </a:spcAft>
+                <a:buClr>
+                  <a:schemeClr val="dk1"/>
+                </a:buClr>
+                <a:buSzPts val="1100"/>
+                <a:buFont typeface="Arial"/>
+                <a:buNone/>
+              </a:pPr>
+              <a:r>
+                <a:rPr b="1" lang="en-US" sz="1100">
+                  <a:solidFill>
+                    <a:srgbClr val="005088"/>
+                  </a:solidFill>
+                  <a:latin typeface="Arial"/>
+                  <a:ea typeface="Arial"/>
+                  <a:cs typeface="Arial"/>
+                  <a:sym typeface="Arial"/>
+                </a:rPr>
+                <a:t>Métodos de Vector a utilizar: </a:t>
+              </a:r>
+              <a:r>
+                <a:rPr lang="en-US" sz="1100">
+                  <a:solidFill>
+                    <a:srgbClr val="188038"/>
+                  </a:solidFill>
+                </a:rPr>
+                <a:t>add(E e)</a:t>
+              </a:r>
+              <a:r>
+                <a:rPr lang="en-US" sz="1100">
+                  <a:solidFill>
+                    <a:schemeClr val="dk1"/>
+                  </a:solidFill>
+                </a:rPr>
+                <a:t>, </a:t>
+              </a:r>
+              <a:r>
+                <a:rPr lang="en-US" sz="1100">
+                  <a:solidFill>
+                    <a:srgbClr val="188038"/>
+                  </a:solidFill>
+                </a:rPr>
+                <a:t>get(int index)</a:t>
+              </a:r>
+              <a:r>
+                <a:rPr lang="en-US" sz="1100">
+                  <a:solidFill>
+                    <a:schemeClr val="dk1"/>
+                  </a:solidFill>
+                </a:rPr>
+                <a:t>, </a:t>
+              </a:r>
+              <a:r>
+                <a:rPr lang="en-US" sz="1100">
+                  <a:solidFill>
+                    <a:srgbClr val="188038"/>
+                  </a:solidFill>
+                </a:rPr>
+                <a:t>set(int index, E element)</a:t>
+              </a:r>
+              <a:r>
+                <a:rPr lang="en-US" sz="1100">
+                  <a:solidFill>
+                    <a:schemeClr val="dk1"/>
+                  </a:solidFill>
+                </a:rPr>
+                <a:t>, </a:t>
+              </a:r>
+              <a:r>
+                <a:rPr lang="en-US" sz="1100">
+                  <a:solidFill>
+                    <a:srgbClr val="188038"/>
+                  </a:solidFill>
+                </a:rPr>
+                <a:t>remove(int index)</a:t>
+              </a:r>
+              <a:r>
+                <a:rPr lang="en-US" sz="1100">
+                  <a:solidFill>
+                    <a:schemeClr val="dk1"/>
+                  </a:solidFill>
+                </a:rPr>
+                <a:t>, </a:t>
+              </a:r>
+              <a:r>
+                <a:rPr lang="en-US" sz="1100">
+                  <a:solidFill>
+                    <a:srgbClr val="188038"/>
+                  </a:solidFill>
+                </a:rPr>
+                <a:t>size(), </a:t>
+              </a:r>
+              <a:r>
+                <a:rPr lang="en-US" sz="1100">
+                  <a:solidFill>
+                    <a:schemeClr val="dk1"/>
+                  </a:solidFill>
+                </a:rPr>
+                <a:t> </a:t>
+              </a:r>
+              <a:r>
+                <a:rPr lang="en-US" sz="1100">
+                  <a:solidFill>
+                    <a:srgbClr val="188038"/>
+                  </a:solidFill>
+                </a:rPr>
+                <a:t>Math.round()</a:t>
+              </a:r>
+              <a:r>
+                <a:rPr lang="en-US" sz="1100">
+                  <a:solidFill>
+                    <a:schemeClr val="dk1"/>
+                  </a:solidFill>
+                </a:rPr>
+                <a:t>, bucle clásico </a:t>
+              </a:r>
+              <a:r>
+                <a:rPr lang="en-US" sz="1100">
+                  <a:solidFill>
+                    <a:srgbClr val="188038"/>
+                  </a:solidFill>
+                </a:rPr>
+                <a:t>for</a:t>
+              </a:r>
+              <a:r>
+                <a:rPr lang="en-US" sz="1100">
+                  <a:solidFill>
+                    <a:schemeClr val="dk1"/>
+                  </a:solidFill>
+                </a:rPr>
+                <a:t>, bucle mejorado </a:t>
+              </a:r>
+              <a:r>
+                <a:rPr lang="en-US" sz="1100">
+                  <a:solidFill>
+                    <a:srgbClr val="188038"/>
+                  </a:solidFill>
+                </a:rPr>
+                <a:t>for-each</a:t>
+              </a:r>
+              <a:endParaRPr b="1" sz="1100">
+                <a:solidFill>
+                  <a:schemeClr val="dk1"/>
+                </a:solidFill>
+              </a:endParaRPr>
+            </a:p>
+          </p:txBody>
+        </p:sp>
+      </p:grpSp>
+    </p:spTree>
+  </p:cSld>
+  <p:clrMapOvr>
+    <a:masterClrMapping/>
+  </p:clrMapOvr>
+</p:sld>
+</file>
+
+<file path=ppt/slides/slide25.xml><?xml version="1.0" encoding="utf-8"?>
+<p:sld xmlns:a="http://schemas.openxmlformats.org/drawingml/2006/main" xmlns:r="http://schemas.openxmlformats.org/officeDocument/2006/relationships" xmlns:mc="http://schemas.openxmlformats.org/markup-compatibility/2006" xmlns:mv="urn:schemas-microsoft-com:mac:vml" xmlns:p="http://schemas.openxmlformats.org/presentationml/2006/main" xmlns:c="http://schemas.openxmlformats.org/drawingml/2006/chart" xmlns:dgm="http://schemas.openxmlformats.org/drawingml/2006/diagram" xmlns:o="urn:schemas-microsoft-com:office:office" xmlns:v="urn:schemas-microsoft-com:vml" xmlns:pvml="urn:schemas-microsoft-com:office:powerpoint" xmlns:com="http://schemas.openxmlformats.org/drawingml/2006/compatibility" xmlns:p14="http://schemas.microsoft.com/office/powerpoint/2010/main" xmlns:p15="http://schemas.microsoft.com/office/powerpoint/2012/main" xmlns:ahyp="http://schemas.microsoft.com/office/drawing/2018/hyperlinkcolor">
+  <p:cSld>
+    <p:spTree>
+      <p:nvGrpSpPr>
+        <p:cNvPr id="533" name="Shape 533"/>
+        <p:cNvGrpSpPr/>
+        <p:nvPr/>
+      </p:nvGrpSpPr>
+      <p:grpSpPr>
+        <a:xfrm>
+          <a:off x="0" y="0"/>
+          <a:ext cx="0" cy="0"/>
+          <a:chOff x="0" y="0"/>
+          <a:chExt cx="0" cy="0"/>
+        </a:xfrm>
+      </p:grpSpPr>
+      <p:pic>
+        <p:nvPicPr>
+          <p:cNvPr descr="image.png" id="534" name="Google Shape;534;p38"/>
           <p:cNvPicPr preferRelativeResize="0"/>
           <p:nvPr/>
         </p:nvPicPr>
@@ -30276,7 +31471,7 @@
       </p:pic>
       <p:pic>
         <p:nvPicPr>
-          <p:cNvPr descr="image.png" id="522" name="Google Shape;522;p37"/>
+          <p:cNvPr descr="image.png" id="535" name="Google Shape;535;p38"/>
           <p:cNvPicPr preferRelativeResize="0"/>
           <p:nvPr/>
         </p:nvPicPr>
@@ -30303,7 +31498,7 @@
       </p:pic>
       <p:sp>
         <p:nvSpPr>
-          <p:cNvPr id="523" name="Google Shape;523;p37"/>
+          <p:cNvPr id="536" name="Google Shape;536;p38"/>
           <p:cNvSpPr txBox="1"/>
           <p:nvPr/>
         </p:nvSpPr>
@@ -30369,7 +31564,7 @@
       </p:sp>
       <p:sp>
         <p:nvSpPr>
-          <p:cNvPr id="524" name="Google Shape;524;p37"/>
+          <p:cNvPr id="537" name="Google Shape;537;p38"/>
           <p:cNvSpPr txBox="1"/>
           <p:nvPr/>
         </p:nvSpPr>
